--- a/slides/study-rl/study-rl.pptx
+++ b/slides/study-rl/study-rl.pptx
@@ -555,7 +555,7 @@
           <a:lstStyle/>
           <a:p>
             <a:r>
-              <a:t>이 덱은 강화학습을 처음 공부하거나 다시 정리하려는 사람을 위한 개념 덱이다. 특정 프로젝트의 결과는 넣지 않았다. 장마다 한 가지 개념을 다루고, 그 개념이 왜 필요한지, 수식이 무엇을 말하는지, 장점과 단점이 무엇인지를 함께 본다. 그림은 대부분 작은 장난감 문제를 실제로 계산해 그린 것이다. 순서는 버클리 CS 285의 강의 흐름을 따른다.</a:t>
+              <a:t>이 덱은 강화학습을 처음 공부하거나 다시 정리하려는 사람을 위한 개념 덱이다. 특정 프로젝트의 결과는 넣지 않았다. 장마다 한 가지 개념을 다루고, 그 개념이 왜 필요한지, 수식이 무엇을 말하는지, 장점과 단점이 무엇인지를 함께 살펴본다. 그림은 대부분 작은 장난감 문제를 실제로 계산해 그린 것이다. 순서는 버클리 CS 285의 강의 흐름을 따른다.</a:t>
             </a:r>
           </a:p>
         </p:txBody>
@@ -765,7 +765,7 @@
           <a:lstStyle/>
           <a:p>
             <a:r>
-              <a:t>Bellman 식은 큰 문제를 한 스텝짜리 문제로 쪼갠다. 지금 상태의 가치는 받을 보상과, 다음 상태 가치의 할인된 기댓값으로 쓸 수 있다. 이 식을 맞추는 방법이 세 가지다. 모델을 알면 동적 계획법으로 모든 다음 상태를 펼쳐 계산한다. 모델이 없으면 에피소드 끝까지 실제로 가 보는 몬테카를로, 또는 한 스텝만 가고 나머지는 지금의 추정을 빌리는 시간차 학습을 쓴다. 시간차 학습은 남의 추정을 빌리므로 부트스트랩이라고도 부르며, 편향과 분산의 맞바꿈이 여기서 처음 나온다.</a:t>
+              <a:t>Bellman 식은 큰 문제를 한 스텝짜리 문제로 쪼갠다. 지금 상태의 가치는 받을 보상과, 다음 상태 가치의 할인된 기댓값으로 쓸 수 있다. 이 식을 맞추는 방법이 세 가지다. 모델을 알면 동적 계획법으로 모든 다음 상태를 펼쳐 계산한다. 모델이 없으면 에피소드 끝까지 실제로 가 보는 몬테카를로, 또는 한 스텝만 가고 나머지는 지금의 추정값으로 채우는 TD 학습(시간차 학습)을 쓴다. TD 학습은 다른 추정값을 가져다 쓰므로 부트스트랩이라고도 부르며, 편향–분산 트레이드오프가 여기서 처음 나온다.</a:t>
             </a:r>
           </a:p>
         </p:txBody>
@@ -835,7 +835,7 @@
           <a:lstStyle/>
           <a:p>
             <a:r>
-              <a:t>밴딧은 상태가 하나뿐인 강화학습이다. 탐색과 활용의 맞바꿈만 따로 떼어 볼 수 있어 좋은 연습 문제다. 탐욕 전략은 처음에 운 좋게 나온 팔에 갇힌다. ε-greedy는 계속 무작위로 시도하므로 후회가 선형으로 늘어난다. UCB와 Thompson 샘플링은 덜 알려진 팔을 더 많이 시도해 후회가 로그 꼴로 늘어난다. 심층 강화학습에서는 정책의 엔트로피 보너스, 행동 잡음, 호기심 보상 같은 방법이 이 역할을 한다.</a:t>
+              <a:t>밴딧은 상태가 하나뿐인 강화학습이다. 탐색과 활용의 트레이드오프만 따로 떼어 볼 수 있어 좋은 연습 문제다. greedy 전략은 처음에 운 좋게 나온 arm에 갇힌다. ε-greedy는 계속 무작위로 시도하므로 regret이 선형으로 늘어난다. UCB와 Thompson 샘플링은 덜 알려진 arm을 더 많이 시도해 regret이 로그적으로 늘어난다. 심층 강화학습에서는 정책의 엔트로피 보너스, 행동 잡음, 호기심 보상 같은 방법이 이 역할을 한다.</a:t>
             </a:r>
           </a:p>
         </p:txBody>
@@ -905,7 +905,7 @@
           <a:lstStyle/>
           <a:p>
             <a:r>
-              <a:t>행동 복제는 시연을 지도학습 자료로 보고 로그 가능도를 키운다. 가장 쉬운 출발점이지만 두 가지 함정이 있다. 첫째는 분포 이동이다. 한 번 틀리면 시연자가 가 본 적 없는 상태에 들어가고, 거기서 더 틀린다. 실수 확률 ε에 대해 누적 실수가 εT²로 커진다는 것이 고전 결과다. DAgger는 학습한 정책으로 굴려 만난 상태에서 전문가에게 다시 라벨을 받아 이를 εT로 줄인다. 둘째는 다봉 문제다. 왼쪽으로 피한 시연과 오른쪽으로 피한 시연을 평균하면 가운데로 간다. 이를 피하려면 혼합 분포, diffusion, flow처럼 여러 모드를 담는 정책을 쓴다.</a:t>
+              <a:t>행동 복제는 시연을 지도학습 데이터로 보고 log-likelihood를 최대화한다. 가장 쉬운 출발점이지만 두 가지 함정이 있다. 첫째는 분포 이동이다. 한 번 틀리면 시연자가 가 본 적 없는 상태에 들어가고, 거기서 더 틀린다. 실수 확률 ε에 대해 누적 실수가 εT²로 커진다는 것이 고전 결과다. DAgger는 학습한 정책을 rollout해 만난 상태에서 전문가에게 다시 라벨을 받아 이를 εT로 줄인다. 둘째는 다봉(multi-modal) 문제다. 왼쪽으로 피한 시연과 오른쪽으로 피한 시연을 평균하면 가운데로 간다. 이를 피하려면 혼합 분포, diffusion, flow처럼 여러 모드를 담는 정책을 쓴다.</a:t>
             </a:r>
           </a:p>
         </p:txBody>
@@ -975,7 +975,7 @@
           <a:lstStyle/>
           <a:p>
             <a:r>
-              <a:t>현대 로봇 학습은 대부분 마지막 줄의 길을 간다. 시연으로 그럴듯한 정책을 먼저 만들고, 강화학습으로 다듬는다. 시연만으로는 시연자의 한계를 넘을 수 없고, 강화학습만으로는 보상이 드문 문제에서 탐색이 너무 오래 걸리기 때문이다. 미세조정 단계에서는 시연 정책과의 KL 거리나 모방 손실을 함께 걸어, 처음 배운 능력을 잃지 않게 한다. 역강화학습은 5장에서 그림과 함께 다시 본다.</a:t>
+              <a:t>현대 로봇 학습은 대부분 마지막 줄의 길을 간다. 시연으로 그럴듯한 정책을 먼저 만들고, 강화학습으로 fine-tuning한다. 시연만으로는 시연자의 한계를 넘을 수 없고, 강화학습만으로는 보상이 드문 문제에서 탐색이 너무 오래 걸리기 때문이다. fine-tuning 단계에서는 시연 정책과의 KL 거리나 모방 손실을 함께 걸어, 처음 배운 능력을 잃지 않게 한다. 역강화학습은 5장에서 그림과 함께 다시 다룬다.</a:t>
             </a:r>
           </a:p>
         </p:txBody>
@@ -1045,7 +1045,7 @@
           <a:lstStyle/>
           <a:p>
             <a:r>
-              <a:t>둘째 장은 정책을 직접 고치는 방법이다. 먼저 로그 미분 요령이라는 배경지식을 보고, REINFORCE, 기준선, 진화 전략, critic과 GAE, 그리고 PPO까지 간다. 모두 같은 질문에 답한다. 표본이 적을 때 기울기의 분산을 어떻게 줄이고, 한 번에 얼마나 고쳐도 되는가.</a:t>
+              <a:t>둘째 장은 정책을 직접 고치는 방법이다. 먼저 로그 미분 트릭이라는 배경지식을 보고, REINFORCE, 기준선, 진화 전략, critic과 GAE, 그리고 PPO까지 간다. 모두 같은 질문에 답한다. 샘플이 적을 때 기울기의 분산을 어떻게 줄이고, 한 번에 얼마나 고쳐도 되는가.</a:t>
             </a:r>
           </a:p>
         </p:txBody>
@@ -1115,7 +1115,7 @@
           <a:lstStyle/>
           <a:p>
             <a:r>
-              <a:t>이 요령은 점수 함수 추정기, 또는 가능도 비율 방법이라고도 부른다. 핵심은 확률의 기울기를 확률 곱하기 로그 확률의 기울기로 바꾸면, 기댓값 형태가 유지되어 표본 평균으로 근사할 수 있다는 것이다. 궤적 확률의 로그를 펼치면 시작 분포와 전이 확률은 θ에 의존하지 않으므로 사라지고, 정책의 로그 확률만 남는다. 이것이 정책 기울기가 모델 없이 동작하는 이유다. 같은 요령이 변분 추론과 진화 전략에도 나온다.</a:t>
+              <a:t>이 트릭은 score function 추정기, 또는 likelihood ratio 방법이라고도 부른다. 핵심은 확률의 gradient를 확률에 log-probability의 gradient를 곱한 꼴로 바꾸면, 기댓값 형태가 유지되어 샘플 평균으로 근사할 수 있다는 것이다. 궤적 확률의 로그를 펼치면 시작 분포와 전이 확률은 θ에 의존하지 않으므로 사라지고, 정책의 log-probability만 남는다. 이것이 정책 기울기가 모델 없이 동작하는 이유다. 같은 트릭이 변분 추론과 진화 전략에도 나온다.</a:t>
             </a:r>
           </a:p>
         </p:txBody>
@@ -1185,7 +1185,7 @@
           <a:lstStyle/>
           <a:p>
             <a:r>
-              <a:t>REINFORCE는 로그 미분 요령을 그대로 쓴 가장 단순한 정책 기울기다. 분산을 줄이는 요령은 둘이다. 첫째는 인과성이다. 시각 t의 행동은 그 이전의 보상에 영향을 줄 수 없으므로 t 이후의 보상만 곱한다. 둘째는 기준선이다. 행동에 의존하지 않는 값을 빼도 기울기의 기댓값은 변하지 않는다는 것을 증명할 수 있다. 가장 흔한 기준선은 평균 수익이나 학습한 상태 가치다. 그림 (a)에서 두 히스토그램의 중심이 같고 폭만 다르다는 것이 그 증거다.</a:t>
+              <a:t>REINFORCE는 로그 미분 트릭을 그대로 쓴 가장 단순한 정책 기울기다. 분산을 줄이는 기법은 둘이다. 첫째는 인과성이다. 시각 t의 행동은 그 이전의 보상에 영향을 줄 수 없으므로 t 이후의 보상만 곱한다. 둘째는 기준선이다. 행동에 의존하지 않는 값을 빼도 기울기의 기댓값은 변하지 않는다는 것을 증명할 수 있다. 가장 흔한 기준선은 평균 수익이나 학습한 상태 가치다. 그림 (a)에서 두 히스토그램의 중심이 같고 폭만 다르다는 것이 그 증거다.</a:t>
             </a:r>
           </a:p>
         </p:txBody>
@@ -1255,7 +1255,7 @@
           <a:lstStyle/>
           <a:p>
             <a:r>
-              <a:t>진화 전략은 행동 대신 정책 파라미터에 잡음을 준다. 그러면 정책 전체를 한 덩어리로 보고 에피소드 점수만으로 기울기를 근사할 수 있다. 파라미터 공간의 REINFORCE라고 보면 된다. 미분할 수 없는 점수, 긴 지평, 쉬운 병렬화가 장점이다. 대신 차원이 커질수록 무작위 방향 하나가 담는 정보가 줄어 표본이 많이 든다. 시뮬레이터가 아주 싸고 정책이 작을 때 좋은 선택이다.</a:t>
+              <a:t>진화 전략은 행동 대신 정책 파라미터에 잡음을 준다. 그러면 정책 전체를 한 덩어리로 보고 에피소드 점수만으로 기울기를 근사할 수 있다. 파라미터 공간의 REINFORCE라고 보면 된다. 미분할 수 없는 점수, 긴 horizon, 쉬운 병렬화가 장점이다. 대신 차원이 커질수록 무작위 방향 하나가 담는 정보가 줄어 샘플이 많이 든다. 시뮬레이터가 아주 싸고 정책이 작을 때 좋은 선택이다.</a:t>
             </a:r>
           </a:p>
         </p:txBody>
@@ -1395,7 +1395,7 @@
           <a:lstStyle/>
           <a:p>
             <a:r>
-              <a:t>REINFORCE의 수익 대신 critic이 낸 이점을 쓰면 actor-critic이 된다. 한 스텝 TD 오차 δ는 분산이 작지만, critic이 틀리면 그 오차가 그대로 편향이 된다. GAE는 TD 오차를 λ로 지수 가중해 더해서 한 스텝과 몬테카를로 사이를 연속적으로 고른다. 실무 팁 하나는 비대칭 critic이다. 배포할 때는 actor만 쓰므로, 시뮬레이션에서 학습할 때 critic에게는 센서로 볼 수 없는 정답 정보를 줘도 된다.</a:t>
+              <a:t>REINFORCE의 수익 대신 critic이 낸 advantage를 쓰면 actor-critic이 된다. 한 스텝 TD 오차 δ는 분산이 작지만, critic이 틀리면 그 오차가 그대로 편향이 된다. GAE는 TD 오차를 λ로 지수 가중해 더해서 한 스텝과 몬테카를로 사이를 연속적으로 고른다. 실무 팁 하나는 비대칭 critic이다. 배포할 때는 actor만 쓰므로, 시뮬레이션에서 학습할 때 critic에게는 센서로 볼 수 없는 정답 정보를 줘도 된다.</a:t>
             </a:r>
           </a:p>
         </p:txBody>
@@ -1465,7 +1465,7 @@
           <a:lstStyle/>
           <a:p>
             <a:r>
-              <a:t>정책을 한 번에 너무 많이 바꾸면 옛 정책으로 모은 표본이 새 정책을 대표하지 못해 학습이 무너진다. TRPO는 옛 정책과의 KL 거리를 제약으로 걸고 켤레 기울기와 선 탐색으로 푼다. PPO는 제약 대신 비율을 1±ε 범위로 잘라 같은 효과를 근사한다. 그 덕에 같은 배치로 여러 번 갱신해도 안전하다. 그림 (c)는 왜 파라미터 거리가 아니라 분포 거리로 보폭을 재야 하는지를 보여 준다.</a:t>
+              <a:t>정책을 한 번에 너무 많이 바꾸면 옛 정책으로 모은 샘플이 새 정책을 대표하지 못해 학습이 무너진다. TRPO는 옛 정책과의 KL 거리를 제약으로 걸고 conjugate gradient와 line search로 푼다. PPO는 제약 대신 비율을 1±ε 범위로 clip해 같은 효과를 근사한다. 그 덕에 같은 배치로 여러 번 갱신해도 안전하다. 그림 (c)는 왜 파라미터 거리가 아니라 분포 거리로 업데이트 크기를 재야 하는지를 보여 준다.</a:t>
             </a:r>
           </a:p>
         </p:txBody>
@@ -1535,7 +1535,7 @@
           <a:lstStyle/>
           <a:p>
             <a:r>
-              <a:t>정책 기울기 계열은 목표를 직접 최적화하므로 수렴이 안정적인 편이다. 대신 on-policy라서 정책이 바뀌면 이전 자료를 버린다. 시뮬레이터가 빠르고 병렬로 수천 개 돌릴 수 있다면 이 단점은 크지 않다. 실물 로봇처럼 표본이 비싸다면 다음 장의 off-policy 방법이나 4장의 모델 기반 방법을 본다.</a:t>
+              <a:t>정책 기울기 계열은 목표를 직접 최적화하므로 수렴이 안정적인 편이다. 대신 on-policy라서 정책이 바뀌면 이전 데이터를 버린다. 시뮬레이터가 빠르고 병렬로 수천 개 돌릴 수 있다면 이 단점은 크지 않다. 실물 로봇처럼 샘플이 비싸다면 다음 장의 off-policy 방법이나 4장의 모델 기반 방법을 살펴본다.</a:t>
             </a:r>
           </a:p>
         </p:txBody>
@@ -1605,7 +1605,7 @@
           <a:lstStyle/>
           <a:p>
             <a:r>
-              <a:t>셋째 장은 가치를 배워 행동을 고르는 쪽이다. Q-learning은 off-policy라 어떤 정책이 모은 자료든 다시 쓸 수 있다. 대신 max 연산이 과대평가를 낳는다. 고정된 자료로만 배우는 오프라인 RL에서는 이 문제가 가장 크게 드러나고, AWR·CQL·IQL 세 가지 해법을 비교한다.</a:t>
+              <a:t>셋째 장은 가치를 배워 행동을 고르는 쪽이다. Q-learning은 off-policy라 어떤 정책이 모은 데이터든 다시 쓸 수 있다. 대신 max 연산이 과대평가를 낳는다. 고정된 데이터로만 배우는 오프라인 RL에서는 이 문제가 가장 크게 드러나고, AWR·CQL·IQL 세 가지 해법을 비교한다.</a:t>
             </a:r>
           </a:p>
         </p:txBody>
@@ -1675,7 +1675,7 @@
           <a:lstStyle/>
           <a:p>
             <a:r>
-              <a:t>Q-learning은 Bellman 최적 식의 고정점을 찾는다. 목표값에 max가 있으므로 데이터를 모은 정책이 무엇이든 상관없다. 이것이 off-policy다. 문제는 max의 과대평가다. 추정값마다 잡음이 있으면, 그중 최댓값은 평균적으로 참 최댓값보다 크다. 이 과대평가가 부트스트랩으로 퍼지면 학습이 발산할 수 있다. Double Q는 행동을 고르는 망과 값을 매기는 망을 나눠서 이 치우침을 줄인다.</a:t>
+              <a:t>Q-learning은 Bellman 최적 식의 고정점을 찾는다. 목표값에 max가 있으므로 데이터를 모은 정책이 무엇이든 상관없다. 이것이 off-policy다. 문제는 max의 과대평가다. 추정값마다 잡음이 있으면, 그중 최댓값은 평균적으로 참 최댓값보다 크다. 이 과대평가가 부트스트랩으로 퍼지면 학습이 발산할 수 있다. Double Q는 행동을 고르는 네트워크와 값을 매기는 네트워크를 나눠서 이 치우침을 줄인다.</a:t>
             </a:r>
           </a:p>
         </p:txBody>
@@ -1745,7 +1745,7 @@
           <a:lstStyle/>
           <a:p>
             <a:r>
-              <a:t>DQN은 표 대신 신경망으로 Q를 표현하면서 생기는 불안정을 공학 장치로 막았다. 경험 재생은 자료 사이의 상관을 끊고 재사용을 늘린다. 목표망은 회귀의 과녁을 일정 시간 고정한다. Double Q는 과대평가를 줄인다. Sutton과 Barto는 함수 근사, 부트스트랩, off-policy 학습이 함께 있으면 발산할 수 있다는 점을 deadly triad라고 불렀다. 연속 행동으로 넓힌 것이 DDPG와 TD3이고, TD3는 두 critic 중 작은 값을 써서 과대평가를 더 줄인다.</a:t>
+              <a:t>DQN은 표(table) 대신 신경망으로 Q를 표현하면서 생기는 불안정을 공학 장치로 막았다. experience replay는 데이터 사이의 상관을 끊고 재사용을 늘린다. 타깃 네트워크는 회귀 타깃을 일정 시간 고정한다. Double Q는 과대평가를 줄인다. Sutton과 Barto는 함수 근사, 부트스트랩, off-policy 학습이 함께 있으면 발산할 수 있다는 점을 deadly triad라고 불렀다. 연속 행동으로 넓힌 것이 DDPG와 TD3이고, TD3는 두 critic 중 작은 값을 써서 과대평가를 더 줄인다.</a:t>
             </a:r>
           </a:p>
         </p:txBody>
@@ -1815,7 +1815,7 @@
           <a:lstStyle/>
           <a:p>
             <a:r>
-              <a:t>on-policy 방법은 학습하는 정책이 직접 모은 자료로만 기울기를 낸다. 정책이 바뀌면 옛 자료는 다른 분포에서 온 것이 되어 쓸 수 없다. 중요도 가중으로 고칠 수는 있지만 비율이 커지면 분산이 폭발한다. off-policy 방법은 Bellman 식의 목표값이 데이터를 모은 정책과 무관하므로 옛 자료를 계속 쓸 수 있다. 수집을 아예 멈추고 고정된 자료만 쓰면 다음 장의 오프라인 RL이다.</a:t>
+              <a:t>on-policy 방법은 학습하는 정책이 직접 모은 데이터로만 기울기를 낸다. 정책이 바뀌면 옛 데이터는 다른 분포에서 온 것이 되어 쓸 수 없다. 중요도 가중으로 고칠 수는 있지만 비율이 커지면 분산이 폭발한다. off-policy 방법은 Bellman 식의 목표값이 데이터를 모은 정책과 무관하므로 옛 데이터를 계속 쓸 수 있다. 수집을 아예 멈추고 고정된 데이터만 쓰면 다음 장의 오프라인 RL이다.</a:t>
             </a:r>
           </a:p>
         </p:txBody>
@@ -1885,7 +1885,7 @@
           <a:lstStyle/>
           <a:p>
             <a:r>
-              <a:t>오프라인 RL은 자료를 모은 정책보다 나은 정책을 같은 자료로 찾는다. 의료 기록, 주행 로그, 로봇 시연처럼 새로 실험하기 어렵거나 위험한 곳에서 쓴다. Q-learning을 그대로 쓰면 max가 자료에 없는 행동의 틀린 값을 고르고, 해 볼 수 없으니 그 믿음이 고쳐지지 않는다. 그림의 빨간 곡선이 그 실패다. 세 방법은 이 행동을 다루는 위치가 다르다. AWR은 정책에서, CQL과 IQL은 가치에서 막는다.</a:t>
+              <a:t>오프라인 RL은 데이터를 모은 정책보다 나은 정책을 같은 데이터로 찾는다. 의료 기록, 주행 로그, 로봇 시연처럼 새로 실험하기 어렵거나 위험한 곳에서 쓴다. Q-learning을 그대로 쓰면 max가 데이터에 없는 행동의 틀린 값을 고르고, 해 볼 수 없으니 그 믿음이 고쳐지지 않는다. 그림의 빨간 곡선이 그 실패다. 세 방법은 이 행동을 다루는 위치가 다르다. AWR은 정책에서, CQL과 IQL은 가치에서 막는다.</a:t>
             </a:r>
           </a:p>
         </p:txBody>
@@ -1955,7 +1955,7 @@
           <a:lstStyle/>
           <a:p>
             <a:r>
-              <a:t>KL 제약 아래 최적 정책을 구하면 자료 정책에 이점의 지수를 곱한 꼴이 나온다. 그래서 자료의 행동을 그 지수로 가중해 행동 복제하면 최적 정책에 투영된다. 이것이 AWR이다. β는 온도다. 작으면 가장 좋은 행동에만 몰리고, 크면 그냥 행동 복제에 가까워진다. 가중 회귀라는 꼴이 단순해서, 로그 확률을 계산하기 어려운 생성 정책을 강화학습으로 다듬을 때 자주 쓰인다.</a:t>
+              <a:t>KL 제약 아래 최적 정책을 구하면 데이터 정책에 advantage의 지수를 곱한 형태가 나온다. 그래서 데이터의 행동을 그 지수로 가중해 행동 복제하면 최적 정책에 투영된다. 이것이 AWR이다. β는 온도다. 작으면 가장 좋은 행동에만 몰리고, 크면 그냥 행동 복제에 가까워진다. 가중 회귀라는 형태가 단순해서, log-probability를 계산하기 어려운 생성 정책을 강화학습으로 fine-tuning할 때 자주 쓰인다.</a:t>
             </a:r>
           </a:p>
         </p:txBody>
@@ -2025,7 +2025,7 @@
           <a:lstStyle/>
           <a:p>
             <a:r>
-              <a:t>CQL은 Conservative Q-Learning, 보수적인 Q 학습이다. 보통의 Q-learning 손실에 벌점 하나를 더한다. 벌점의 앞 항은 모든 행동에 걸친 로그합지수, 즉 부드러운 최댓값이다. 이것을 줄이면 Q가 큰 행동부터 내려간다. 뒤 항은 자료에 실제로 있는 행동의 Q를 다시 올린다. 숫자 예에서 a₃는 자료에 없는데 Q가 1.5로 가장 높았다. 벌점의 기울기만 보면 a₃가 내려가고 자료의 두 행동은 오히려 올라간다. 손잡이는 α 하나다.</a:t>
+              <a:t>CQL은 Conservative Q-Learning, 보수적인 Q 학습이다. 보통의 Q-learning 손실에 페널티 항 하나를 더한다. 페널티의 앞 항은 모든 행동에 걸친 log-sum-exp, 즉 soft max다. 이것을 줄이면 Q가 큰 행동부터 내려간다. 뒤 항은 데이터에 실제로 있는 행동의 Q를 다시 올린다. 숫자 예에서 a₃는 데이터에 없는데 Q가 1.5로 가장 높았다. 페널티의 gradient만 보면 a₃가 내려가고 데이터의 두 행동은 오히려 올라간다. 조절할 하이퍼파라미터는 α 하나다.</a:t>
             </a:r>
           </a:p>
         </p:txBody>
@@ -2165,7 +2165,7 @@
           <a:lstStyle/>
           <a:p>
             <a:r>
-              <a:t>IQL은 Implicit Q-Learning이다. Q-learning 목표의 max가 문제라면, max를 아예 쓰지 않는다. 대신 상태 가치 V를 따로 두고, 자료에 있는 행동들의 Q 가운데 높은 쪽을 V가 맞추게 한다. 이때 쓰는 것이 expectile이다. 평균은 제곱 오차를 최소화하는 값이고, expectile은 양쪽 오차에 다른 무게를 주어 최소화하는 값이다. τ가 0.5면 평균, 1에 가까우면 최댓값 쪽이다. Q는 다음 상태의 V로 배우므로 학습 내내 자료 밖 행동의 Q를 계산하지 않는다.</a:t>
+              <a:t>IQL은 Implicit Q-Learning이다. Q-learning 목표의 max가 문제라면, max를 아예 쓰지 않는다. 대신 상태 가치 V를 따로 두고, 데이터에 있는 행동들의 Q 가운데 높은 쪽을 V가 맞추게 한다. 이때 쓰는 것이 expectile이다. 평균은 제곱 오차를 최소화하는 값이고, expectile은 양쪽 오차에 다른 무게를 주어 최소화하는 값이다. τ가 0.5면 평균, 1에 가까우면 최댓값 쪽이다. Q는 다음 상태의 V로 배우므로 학습 내내 데이터 밖 행동의 Q를 계산하지 않는다.</a:t>
             </a:r>
           </a:p>
         </p:txBody>
@@ -2235,7 +2235,7 @@
           <a:lstStyle/>
           <a:p>
             <a:r>
-              <a:t>세 방법을 한 표로 놓았다. 모두 같은 문제, 즉 자료에 없는 행동의 값을 믿지 않으려는 방법이다. AWR은 정책 쪽에서 막는다. CQL은 Q 자체를 자료 밖에서 낮게 배운다. IQL도 가치 쪽이지만 깎는 대신 묻지 않는다. 오프라인 RL의 공통 한계는 자료의 범위다. 자료에 좋은 행동이 전혀 없다면 어떤 방법도 그것을 만들어 내지 못한다. 그래서 오프라인으로 시작해 온라인 미세조정으로 넘어가는 순서가 흔하다.</a:t>
+              <a:t>세 방법을 한 표로 놓았다. 모두 같은 문제, 즉 데이터에 없는 행동의 값을 믿지 않으려는 방법이다. AWR은 정책 쪽에서 막는다. CQL은 Q 자체를 데이터 밖에서 낮게 배운다. IQL도 가치 쪽이지만 깎는 대신 묻지 않는다. 오프라인 RL의 공통 한계는 데이터의 범위다. 데이터에 좋은 행동이 전혀 없다면 어떤 방법도 그것을 만들어 내지 못한다. 그래서 오프라인으로 시작해 온라인 fine-tuning으로 넘어가는 순서가 흔하다.</a:t>
             </a:r>
           </a:p>
         </p:txBody>
@@ -2305,7 +2305,7 @@
           <a:lstStyle/>
           <a:p>
             <a:r>
-              <a:t>넷째 장은 같은 문제를 다른 눈으로 본다. 제어를 확률 추론으로 보면 최대 엔트로피 강화학습과 SAC, 그리고 표본 기반 MPC인 MPPI가 같은 식에서 나온다. 이어서 KL의 방향과 온도라는 배경지식, 고전 최적 제어인 LQR, 그리고 모델을 배워 쓰는 모델 기반 강화학습의 장단점을 본다.</a:t>
+              <a:t>넷째 장은 같은 문제를 다른 눈으로 본다. 제어를 확률 추론으로 보면 최대 엔트로피 강화학습과 SAC, 그리고 샘플링 기반 MPC인 MPPI가 같은 식에서 나온다. 이어서 KL의 방향과 온도라는 배경지식, 고전 최적 제어인 LQR, 그리고 모델을 배워 쓰는 모델 기반 강화학습의 장단점을 살펴본다.</a:t>
             </a:r>
           </a:p>
         </p:txBody>
@@ -2375,7 +2375,7 @@
           <a:lstStyle/>
           <a:p>
             <a:r>
-              <a:t>각 시각에 "이 스텝이 최적이다"라는 이진 변수를 두고 그 확률을 보상의 지수로 정하면, 최적 궤적의 사후분포가 나온다. 이 사후분포를 정책으로 근사하면 엔트로피 보너스가 붙은 최대 엔트로피 RL이 되고, SAC가 그 actor-critic 판이다. 정책을 배우지 않고 매 스텝 행동열을 직접 추론하면 MPPI가 된다. 엔트로피 항은 정책이 너무 일찍 한 행동에 확신하지 않게 해서 탐색을 유지한다.</a:t>
+              <a:t>각 시각에 "이 스텝이 최적이다"라는 이진 변수를 두고 그 확률을 보상의 지수로 정하면, 최적 궤적의 사후분포가 나온다. 이 사후분포를 정책으로 근사하면 엔트로피 보너스가 붙은 최대 엔트로피 RL이 되고, SAC가 그 actor-critic 판이다. 정책을 배우지 않고 매 스텝 행동 시퀀스를 직접 추론하면 MPPI가 된다. 엔트로피 항은 정책이 너무 일찍 한 행동에 확신하지 않게 해서 탐색을 유지한다.</a:t>
             </a:r>
           </a:p>
         </p:txBody>
@@ -2445,7 +2445,7 @@
           <a:lstStyle/>
           <a:p>
             <a:r>
-              <a:t>KL 발산은 두 분포가 얼마나 다른지 재는 양이다. 강화학습에서는 정책을 너무 많이 바꾸지 않게 하는 제약으로(TRPO, RLHF), 그리고 목표 분포를 근사하는 기준으로 자주 나온다. 방향에 따라 성격이 다르다. 전방 KL은 p가 확률을 둔 곳에 q가 0이면 무한대가 되므로 q가 모든 모드를 덮으려 한다. 역방향 KL은 q가 확률을 둔 곳에 p가 0이면 무한대가 되므로 q가 한 모드 안에 숨는다. 행동 복제의 평균 문제가 전방 KL의 모습이다.</a:t>
+              <a:t>KL 발산은 두 분포가 얼마나 다른지 재는 양이다. 강화학습에서는 정책을 너무 많이 바꾸지 않게 하는 제약으로(TRPO, RLHF), 그리고 목표 분포를 근사하는 기준으로 자주 나온다. 방향에 따라 성격이 다르다. forward KL은 p가 확률을 둔 곳에 q가 0이면 무한대가 되므로 q가 모든 모드를 덮으려 한다. reverse KL은 q가 확률을 둔 곳에 p가 0이면 무한대가 되므로 q가 한 모드 안에 숨는다. 행동 복제의 평균 문제가 forward KL의 모습이다.</a:t>
             </a:r>
           </a:p>
         </p:txBody>
@@ -2515,7 +2515,7 @@
           <a:lstStyle/>
           <a:p>
             <a:r>
-              <a:t>온도는 softmax 가중의 날카로움을 정한다. 낮추면 최선의 표본 하나만 쓰는 탐욕 선택이 되고, 높이면 모든 표본의 평균에 가까워진다. 유효 표본 수는 가중이 몇 개의 표본에 퍼져 있는지를 재는 지표다. 같은 온도가 SAC의 α, AWR의 β, 볼츠만 탐색에도 나온다. 주의할 점은 온도가 비용의 크기와 함께 움직인다는 것이다. 비용을 10배로 키우면 온도를 10배로 낮춘 것과 같다.</a:t>
+              <a:t>온도는 softmax 가중의 날카로움을 정한다. 낮추면 최선의 샘플 하나만 쓰는 greedy 선택이 되고, 높이면 모든 샘플의 평균에 가까워진다. 유효 샘플 수는 가중이 몇 개의 샘플에 퍼져 있는지를 재는 지표다. 같은 온도가 SAC의 α, AWR의 β, 볼츠만 탐색에도 나온다. 주의할 점은 온도가 비용의 크기와 함께 움직인다는 것이다. 비용을 10배로 키우면 온도를 10배로 낮춘 것과 같다.</a:t>
             </a:r>
           </a:p>
         </p:txBody>
@@ -2585,7 +2585,7 @@
           <a:lstStyle/>
           <a:p>
             <a:r>
-              <a:t>LQR은 강화학습이 생기기 전부터 있던 최적 제어의 기준점이다. 동역학이 선형이고 비용이 이차 형식이면, 최적 정책이 상태에 대한 선형 되먹임이라는 것을 증명할 수 있다. 이득 K는 Riccati 식을 거꾸로 풀어 얻는다. Q와 R의 비율이 "상태 오차를 얼마나 싫어하나"와 "입력을 얼마나 아끼나"를 맞바꾼다. 강화학습은 모델을 모르거나, 비용이 이런 매끄러운 꼴이 아닐 때 쓰는 일반화로 볼 수 있다.</a:t>
+              <a:t>LQR은 강화학습이 생기기 전부터 있던 최적 제어의 기준점이다. 동역학이 선형이고 비용이 이차 형식이면, 최적 정책이 상태에 대한 선형 피드백이라는 것을 증명할 수 있다. 게인 K는 Riccati 식을 거꾸로 풀어 얻는다. Q와 R의 비율이 "상태 오차를 얼마나 싫어하나"와 "입력을 얼마나 아끼나" 사이의 트레이드오프를 정한다. 강화학습은 모델을 모르거나, 비용이 이런 매끄러운 형태가 아닐 때 쓰는 일반화로 볼 수 있다.</a:t>
             </a:r>
           </a:p>
         </p:txBody>
@@ -2655,7 +2655,7 @@
           <a:lstStyle/>
           <a:p>
             <a:r>
-              <a:t>전이 모델을 배우면 실제 상호작용 없이 머릿속으로 굴려 볼 수 있어 표본 효율이 높다. 대신 계획기나 정책 최적화가 모델이 실제보다 좋게 보는 행동을 골라낸다. 오프라인 RL의 과대평가와 같은 문제다. 대책은 셋이다. 앙상블의 불일치로 모르는 곳을 표시해 비관적으로 평가하고, 오차가 쌓이지 않게 짧게만 굴리고, 관측 대신 작은 잠재 공간에서 굴린다.</a:t>
+              <a:t>전이 모델을 배우면 실제 상호작용 없이 모델 안에서 rollout해 볼 수 있어 샘플 효율이 높다. 대신 플래너나 정책 최적화가 모델이 실제보다 좋게 보는 행동을 골라낸다. 오프라인 RL의 과대평가와 같은 문제다. 대책은 셋이다. 앙상블의 불일치로 모르는 곳을 표시해 비관적으로 평가하고, 오차가 쌓이지 않게 짧게만 rollout하고, 관측 대신 작은 latent 공간에서 rollout한다.</a:t>
             </a:r>
           </a:p>
         </p:txBody>
@@ -2725,7 +2725,7 @@
           <a:lstStyle/>
           <a:p>
             <a:r>
-              <a:t>표의 장단점은 경향이지 법칙이 아니다. 시뮬레이터가 빠르면 모델 없는 방법의 표본 비용은 크게 문제 되지 않는다. 실물 로봇처럼 표본이 비싸면 모델 기반이 유리하다. 모델을 손으로 알고 있는 경우, 예를 들어 바퀴 로봇의 운동학처럼, 계획 기반 제어기가 학습 없이도 잘 동작한다. 최근 방법은 대부분 둘을 섞어 각자의 약점을 메운다.</a:t>
+              <a:t>표의 장단점은 경향이지 법칙이 아니다. 시뮬레이터가 빠르면 모델 없는 방법의 샘플 비용은 크게 문제 되지 않는다. 실물 로봇처럼 샘플이 비싸면 모델 기반이 유리하다. 모델을 이미 알고 있는 경우, 예를 들어 바퀴 로봇의 운동학처럼, 계획 기반 제어기가 학습 없이도 잘 동작한다. 최근 방법은 대부분 둘을 섞어 각자의 약점을 메운다.</a:t>
             </a:r>
           </a:p>
         </p:txBody>
@@ -2795,7 +2795,7 @@
           <a:lstStyle/>
           <a:p>
             <a:r>
-              <a:t>다섯째 장은 알고리즘보다 앞에 있는 질문, 즉 보상을 다룬다. 보상을 잘못 설계하면 어떤 알고리즘도 엉뚱한 것을 배운다. 보상이 드물면 실패를 재활용하고, 보상을 쓰기 어려우면 시연이나 사람 선호에서 얻는다. 이어서 diffusion·flow 같은 생성 정책을 강화학습에 넣는 법과, 안전을 평균이 아니라 꼬리로 보는 법을 본다.</a:t>
+              <a:t>다섯째 장은 알고리즘보다 앞에 있는 질문, 즉 보상을 다룬다. 보상을 잘못 설계하면 어떤 알고리즘도 엉뚱한 것을 배운다. 보상이 희소하면 실패를 재활용하고, 보상을 쓰기 어려우면 시연이나 사람 선호에서 얻는다. 이어서 diffusion·flow 같은 생성 정책을 강화학습에 넣는 법과, 안전을 평균이 아니라 꼬리로 보는 법을 다룬다.</a:t>
             </a:r>
           </a:p>
         </p:txBody>
@@ -2865,7 +2865,7 @@
           <a:lstStyle/>
           <a:p>
             <a:r>
-              <a:t>확률은 기댓값과 표본 평균의 관계만 알면 된다. 최적화는 경사 하강법을 반대로 쓰는 경사 상승법이다. 함수 근사는 신경망을 회귀 손실로 맞추는 것인데, 강화학습에서는 맞출 목표값이 학습 중에 계속 바뀐다는 점이 지도학습과 다르다. 마르코프 성질이 깨지는 경우, 즉 센서가 상태의 일부만 보는 경우는 부분 관측 MDP라 부르고 과거 관측을 기억하는 정책이 필요하다.</a:t>
+              <a:t>확률은 기댓값과 샘플 평균의 관계만 알면 된다. 최적화는 경사 하강법을 반대로 쓰는 경사 상승법이다. 함수 근사는 신경망을 회귀 손실로 맞추는 것인데, 강화학습에서는 맞출 목표값이 학습 중에 계속 바뀐다는 점이 지도학습과 다르다. 마르코프 성질이 깨지는 경우, 즉 센서가 상태의 일부만 보는 경우는 부분 관측 MDP(POMDP)라 부르고 과거 관측을 기억하는 정책이 필요하다.</a:t>
             </a:r>
           </a:p>
         </p:txBody>
@@ -2935,7 +2935,7 @@
           <a:lstStyle/>
           <a:p>
             <a:r>
-              <a:t>보상은 설계자가 에이전트에게 목표를 전하는 유일한 통로다. 드문 보상은 정직하지만 학습 신호가 없고, 촘촘한 보상은 학습이 빠르지만 에이전트가 설계자가 예상하지 못한 지름길을 찾는다. 이를 보상 해킹, 또는 명세 게이밍이라 부른다. 잠재 함수 기반 보상 조형은 상태의 함수 Φ의 차이만 더하므로, 한 궤적에서 더해진 값이 시작과 끝의 Φ로만 정해져 최적 정책이 바뀌지 않는다는 것이 증명되어 있다. 보상을 더하고 싶다면 이 꼴을 먼저 생각하자.</a:t>
+              <a:t>보상은 설계자가 에이전트에게 목표를 전하는 유일한 통로다. 희소 보상은 정직하지만 학습 신호가 없고, 조밀한 보상은 학습이 빠르지만 에이전트가 설계자가 예상하지 못한 지름길을 찾는다. 이를 보상 해킹, 또는 specification gaming이라 부른다. 퍼텐셜 기반 reward shaping은 상태의 함수 Φ의 차이만 더하므로, 한 궤적에서 더해진 값이 시작과 끝의 Φ로만 정해져 최적 정책이 바뀌지 않는다는 것이 증명되어 있다. 보상을 더하고 싶다면 이 형태를 먼저 생각하자.</a:t>
             </a:r>
           </a:p>
         </p:txBody>
@@ -3005,7 +3005,7 @@
           <a:lstStyle/>
           <a:p>
             <a:r>
-              <a:t>HER는 드문 보상 문제에 쓰는 간단하고 강력한 요령이다. 물체를 A로 옮기려다 B에 놓았다면, 그 궤적은 "B로 옮기기"의 성공 시연이다. 재생 버퍼에 원래 목표뿐 아니라 나중에 실제로 도달한 상태를 목표로 바꾼 사본을 함께 넣는다. 그러면 처음부터 많은 성공 사례가 생겨 학습이 시작된다. off-policy 학습이어야 목표를 바꾼 자료를 쓸 수 있다.</a:t>
+              <a:t>HER는 희소 보상 문제에 쓰는 간단하고 강력한 요령이다. 물체를 A로 옮기려다 B에 놓았다면, 그 궤적은 "B로 옮기기"의 성공 시연이다. 리플레이 버퍼에 원래 목표뿐 아니라 나중에 실제로 도달한 상태를 목표로 바꾼 사본을 함께 넣는다. 그러면 처음부터 많은 성공 사례가 생겨 학습이 시작된다. off-policy 학습이어야 목표를 바꾼 데이터를 쓸 수 있다.</a:t>
             </a:r>
           </a:p>
         </p:txBody>
@@ -3075,7 +3075,7 @@
           <a:lstStyle/>
           <a:p>
             <a:r>
-              <a:t>행동 복제가 "무엇을 했나"를 따라 한다면, 역강화학습은 "왜 그렇게 했나"를 추정한다. 최대 엔트로피 IRL은 시연이 보상의 지수에 비례하는 확률로 나왔다고 보고, 시연의 상태 방문 빈도와 학습한 보상으로 굴린 정책의 방문 빈도가 같아지도록 보상을 고친다. 그림 (c)에서 시연이 한 번도 가지 않은 함정 칸의 값이 정확하지 않은 것이 모호성의 예다. 자료가 없는 곳은 보상도 알 수 없다. GAIL은 같은 생각을 판별기로 구현한 것이다.</a:t>
+              <a:t>행동 복제가 "무엇을 했나"를 따라 한다면, 역강화학습은 "왜 그렇게 했나"를 추정한다. 최대 엔트로피 IRL은 시연이 보상의 지수에 비례하는 확률로 나왔다고 보고, 시연의 상태 방문 빈도와, 학습한 보상으로 구한 정책의 방문 빈도가 같아지도록 보상을 고친다. 그림 (c)에서 시연이 한 번도 가지 않은 함정 칸의 값이 정확하지 않은 것이 모호성의 예다. 데이터가 없는 곳은 보상도 알 수 없다. GAIL은 같은 아이디어를 discriminator로 구현한 것이다.</a:t>
             </a:r>
           </a:p>
         </p:txBody>
@@ -3145,7 +3145,7 @@
           <a:lstStyle/>
           <a:p>
             <a:r>
-              <a:t>언어 모델도 토큰을 행동으로 고르는 정책이다. RLHF는 사람이 두 응답 중 나은 쪽을 고른 자료로 보상 모델을 배우고, KL 항으로 원래 모델에서 너무 멀어지지 않게 묶는다. 그 KL 항이 없으면 보상 모델의 약점을 파고드는 응답을 만든다. DPO는 이 문제의 최적해를 닫힌 꼴로 풀어, 보상 모델 없이 선호 쌍에 직접 분류 손실을 건다. GRPO는 같은 질문의 응답 여러 개를 그룹으로 정규화해 이점으로 쓰므로 critic이 필요 없다. 2장의 기준선 빼기와 같은 생각이다.</a:t>
+              <a:t>언어 모델도 토큰을 행동으로 고르는 정책이다. RLHF는 사람이 두 응답 중 나은 쪽을 고른 데이터로 보상 모델을 배우고, KL 항으로 원래 모델에서 너무 멀어지지 않게 제약한다. 그 KL 항이 없으면 보상 모델의 약점을 파고드는 응답을 만든다. DPO는 이 문제의 최적해를 closed-form으로 풀어, 보상 모델 없이 선호 쌍에 직접 분류 손실을 건다. GRPO는 같은 질문의 응답 여러 개를 그룹으로 정규화해 advantage로 쓰므로 critic이 필요 없다. 2장의 기준선 빼기와 같은 아이디어다.</a:t>
             </a:r>
           </a:p>
         </p:txBody>
@@ -3215,7 +3215,7 @@
           <a:lstStyle/>
           <a:p>
             <a:r>
-              <a:t>가우시안 정책은 모드가 하나라서 왼쪽과 오른쪽 두 해가 있는 문제에서 평균을 낸다. diffusion과 flow 정책은 잡음을 여러 스텝에 걸쳐 행동으로 바꾸므로 여러 모드를 자연스럽게 담는다. 문제는 PPO 같은 정책 기울기가 요구하는 로그 확률을 바로 계산하기 어렵다는 것이다. 표의 다섯 길은 이 문제를 각자 다르게 우회한다. 처음 공부할 때는 마지막 줄의 가중 회귀가 가장 이해하기 쉽고, 3장의 AWR과 같은 식이다.</a:t>
+              <a:t>가우시안 정책은 모드가 하나라서 왼쪽과 오른쪽 두 해가 있는 문제에서 평균을 낸다. diffusion과 flow 정책은 잡음을 여러 스텝에 걸쳐 행동으로 바꾸므로 여러 모드를 자연스럽게 담는다. 문제는 PPO 같은 정책 기울기가 요구하는 log-probability를 바로 계산하기 어렵다는 것이다. 표의 다섯 방법은 이 문제를 각자 다르게 우회한다. 처음 공부할 때는 마지막 줄의 가중 회귀가 가장 이해하기 쉽고, 3장의 AWR과 같은 식이다.</a:t>
             </a:r>
           </a:p>
         </p:txBody>
@@ -3285,7 +3285,7 @@
           <a:lstStyle/>
           <a:p>
             <a:r>
-              <a:t>제약 MDP는 보상과 별도로 비용의 기댓값에 상한을 둔다. 라그랑주 방법은 이 제약을 벌점 계수로 바꾸고 계수도 함께 학습한다. 하지만 기댓값 제약은 드물게 일어나는 큰 사고를 평균 속에 묻는다. 그림의 정책 B처럼 대개는 좋지만 가끔 크게 나쁜 정책을 걸러 내려면 CVaR처럼 꼬리를 보는 척도가 필요하다. 학습만으로는 보장을 얻기 어려우므로, 실물에서는 학습한 정책 뒤에 제어 장벽 함수 같은 안전 필터를 두는 경우가 많다.</a:t>
+              <a:t>제약 MDP는 보상과 별도로 비용의 기댓값에 상한을 둔다. 라그랑주 방법은 이 제약을 페널티 계수로 바꾸고 계수도 함께 학습한다. 하지만 기댓값 제약은 드물게 일어나는 큰 사고를 평균 속에 묻는다. 그림의 정책 B처럼 대개는 좋지만 가끔 크게 나쁜 정책을 걸러 내려면 CVaR처럼 꼬리를 보는 척도가 필요하다. 학습만으로는 보장을 얻기 어려우므로, 실물에서는 학습한 정책 뒤에 제어 장벽 함수(CBF) 같은 안전 필터를 두는 경우가 많다.</a:t>
             </a:r>
           </a:p>
         </p:txBody>
@@ -3355,7 +3355,7 @@
           <a:lstStyle/>
           <a:p>
             <a:r>
-              <a:t>마지막 장은 복습용이다. 지금까지 본 방법을 표본 효율의 축 위에 놓고, 장단점을 한 표에 모은다. 실험할 때 흔히 빠지는 함정과, 이 덱 다음에 무엇을 공부하면 좋은지도 정리한다.</a:t>
+              <a:t>마지막 장은 복습용이다. 지금까지 본 방법을 샘플 효율의 축 위에 놓고, 장단점을 한 표에 모은다. 실험할 때 흔히 빠지는 함정과, 이 덱 다음에 무엇을 공부하면 좋은지도 정리한다.</a:t>
             </a:r>
           </a:p>
         </p:txBody>
@@ -3425,7 +3425,7 @@
           <a:lstStyle/>
           <a:p>
             <a:r>
-              <a:t>왼쪽에서 오른쪽으로 갈수록 한 표본에서 뽑아내는 정보가 많아진다. 진화 전략은 에피소드 하나에 숫자 하나만 쓰고, 정책 기울기는 스텝마다 쓰지만 한 번 쓰고 버린다. off-policy는 같은 자료를 여러 번 쓰고, 모델 기반은 자료로 모델을 만들어 무한히 상상한다. 오프라인은 아예 새 표본이 없다. 대가는 가정이다. 재생 자료가 여전히 쓸모 있다는 가정, critic이 맞다는 가정, 모델이 맞다는 가정이 차례로 붙는다.</a:t>
+              <a:t>왼쪽에서 오른쪽으로 갈수록 한 샘플에서 뽑아내는 정보가 많아진다. 진화 전략은 에피소드 하나에 숫자 하나만 쓰고, 정책 기울기는 스텝마다 쓰지만 한 번 쓰고 버린다. off-policy는 같은 데이터를 여러 번 쓰고, 모델 기반은 데이터로 모델을 만들어 무한히 rollout한다. 오프라인은 아예 새 샘플이 없다. 대가는 가정이다. 리플레이 버퍼의 데이터가 여전히 쓸모 있다는 가정, critic이 맞다는 가정, 모델이 맞다는 가정이 차례로 붙는다.</a:t>
             </a:r>
           </a:p>
         </p:txBody>
@@ -3495,7 +3495,7 @@
           <a:lstStyle/>
           <a:p>
             <a:r>
-              <a:t>복습용 표다. 자료 열의 on과 off는 on-policy와 off-policy다. 실무에서 처음 시도한다면 이산 행동은 DQN 계열, 연속 행동은 PPO나 SAC가 흔한 출발점이다. 병렬 시뮬레이터가 있으면 PPO, 표본이 귀하면 SAC를 먼저 본다. 표의 장단점은 경향이며, 같은 알고리즘도 구현 세부와 하이퍼파라미터에 따라 결과가 크게 달라진다.</a:t>
+              <a:t>복습용 표다. 데이터 열의 on과 off는 on-policy와 off-policy다. 실무에서 처음 시도한다면 이산 행동은 DQN 계열, 연속 행동은 PPO나 SAC가 흔한 출발점이다. 병렬 시뮬레이터가 있으면 PPO, 샘플이 귀하면 SAC를 먼저 본다. 표의 장단점은 경향이며, 같은 알고리즘도 구현 세부와 하이퍼파라미터에 따라 결과가 크게 달라진다.</a:t>
             </a:r>
           </a:p>
         </p:txBody>
@@ -3565,7 +3565,7 @@
           <a:lstStyle/>
           <a:p>
             <a:r>
-              <a:t>두 번째 표는 모델이나 자료를 쓰는 방법이다. 공통 질문은 "무엇을 가정하나"다. 모델 기반은 모델이 맞다고, 오프라인은 자료가 충분히 넓다고, IRL과 RLHF는 시연이나 선호가 진짜 의도를 담는다고 가정한다. 그 가정이 깨지는 곳이 각 방법의 실패 지점이다.</a:t>
+              <a:t>두 번째 표는 모델이나 데이터를 쓰는 방법이다. 공통 질문은 "무엇을 가정하나"다. 모델 기반은 모델이 맞다고, 오프라인은 데이터가 충분히 넓다고, IRL과 RLHF는 시연이나 선호가 진짜 의도를 담는다고 가정한다. 그 가정이 깨지는 곳이 각 방법의 실패 지점이다.</a:t>
             </a:r>
           </a:p>
         </p:txBody>
@@ -3635,7 +3635,7 @@
           <a:lstStyle/>
           <a:p>
             <a:r>
-              <a:t>강화학습의 기울기와 가치는 모두 표본으로 추정한다. 몬테카를로 수익은 편향이 없지만 한 에피소드의 운에 크게 흔들린다. 학습한 가치 함수를 빌리면 흔들림은 줄지만, 그 가치 함수가 틀린 만큼 편향이 생긴다. 이후 장에서 "분산이 줄고 편향이 생긴다"는 말이 반복되는데, 모두 이 분해를 가리킨다. 기준선 빼기처럼 편향 없이 분산만 줄이는 드문 요령도 있다.</a:t>
+              <a:t>강화학습의 기울기와 가치는 모두 샘플로 추정한다. 몬테카를로 수익은 편향이 없지만 한 에피소드의 운에 크게 흔들린다. 학습한 가치 함수로 대신하면 흔들림은 줄지만, 그 가치 함수가 틀린 만큼 편향이 생긴다. 이후 장에서 "분산이 줄고 편향이 생긴다"는 말이 반복되는데, 모두 이 분해를 가리킨다. 기준선 빼기처럼 편향 없이 분산만 줄이는 드문 기법도 있다.</a:t>
             </a:r>
           </a:p>
         </p:txBody>
@@ -3845,7 +3845,7 @@
           <a:lstStyle/>
           <a:p>
             <a:r>
-              <a:t>오늘 본 것을 여섯 상자로 줄였다. 강화학습은 MDP를 세우고, 세 가지 어려움을 이런저런 장치로 푸는 일이다. 방법은 무엇을 배우느냐로 나뉘고, 자료와 모델을 얼마나 믿느냐로 다시 나뉜다. 모든 선택은 맞바꿈이며, 그 맞바꿈을 판단하려면 실험을 통계적으로 읽을 줄 알아야 한다.</a:t>
+              <a:t>오늘 본 것을 여섯 카드로 줄였다. 강화학습은 MDP를 세우고, 세 가지 어려움을 이런저런 장치로 푸는 일이다. 방법은 무엇을 배우느냐로 나뉘고, 데이터와 모델을 얼마나 믿느냐로 다시 나뉜다. 모든 선택은 트레이드오프이며, 그 트레이드오프를 판단하려면 실험을 통계적으로 읽을 줄 알아야 한다.</a:t>
             </a:r>
           </a:p>
         </p:txBody>
@@ -4055,7 +4055,7 @@
           <a:lstStyle/>
           <a:p>
             <a:r>
-              <a:t>지도학습과의 차이는 두 가지로 요약된다. 정답 대신 점수를 받는다는 것, 그리고 내 행동이 다음 입력을 바꾼다는 것이다. 여기서 강화학습의 세 가지 어려움이 나온다. 신용 할당은 늦게 오는 보상을 앞의 행동들에 나눠 주는 문제다. 탐색은 모르는 행동을 시도해야 더 좋은 것을 찾는다는 문제다. 분포 이동은 학습 자료가 고정되어 있지 않다는 문제다. 이 덱의 모든 방법은 이 셋 중 하나 이상을 푼다.</a:t>
+              <a:t>지도학습과의 차이는 두 가지로 요약된다. 정답 대신 점수를 받는다는 것, 그리고 내 행동이 다음 입력을 바꾼다는 것이다. 여기서 강화학습의 세 가지 어려움이 나온다. 신용 할당은 늦게 오는 보상을 앞의 행동들에 나눠 주는 문제다. 탐색은 모르는 행동을 시도해야 더 좋은 것을 찾는다는 문제다. 분포 이동은 학습 데이터가 고정되어 있지 않다는 문제다. 이 덱의 모든 방법은 이 셋 중 하나 이상을 푼다.</a:t>
             </a:r>
           </a:p>
         </p:txBody>
@@ -4125,7 +4125,7 @@
           <a:lstStyle/>
           <a:p>
             <a:r>
-              <a:t>정책을 직접 배우면 정책 기울기, 행동 가치를 배워 최댓값을 고르면 가치 기반, 둘을 함께 배우면 actor-critic이다. 전이 모델을 알거나 배워 미리 굴려 보면 모델 기반이고, 새 상호작용 없이 모아 둔 자료로만 배우면 오프라인 RL이나 모방학습이다. 처음 공부할 때는 이 지도를 옆에 두고, 지금 보는 방법이 어느 칸에 있는지 확인하며 읽으면 길을 잃지 않는다.</a:t>
+              <a:t>정책을 직접 배우면 정책 기울기, 행동 가치를 배워 최댓값을 고르면 가치 기반, 둘을 함께 배우면 actor-critic이다. 전이 모델을 알거나 배워 미리 시뮬레이션해 보면 모델 기반이고, 새 상호작용 없이 모아 둔 데이터로만 배우면 오프라인 RL이나 모방학습이다. 처음 공부할 때는 이 지도를 옆에 두고, 지금 보는 방법이 어느 칸에 있는지 확인하며 읽으면 길을 잃지 않는다.</a:t>
             </a:r>
           </a:p>
         </p:txBody>
@@ -4195,7 +4195,7 @@
           <a:lstStyle/>
           <a:p>
             <a:r>
-              <a:t>첫 장은 문제를 수식으로 세운다. 용어, MDP, 할인율, Bellman 식, 탐색, 그리고 모방학습의 분포 이동까지 본다. 이 장의 Bellman 식과 분포 이동은 뒤의 모든 장에 다시 나온다.</a:t>
+              <a:t>첫 장은 문제를 수식으로 세운다. 용어, MDP, 할인율, Bellman 식, 탐색, 그리고 모방학습의 분포 이동까지 다룬다. 이 장의 Bellman 식과 분포 이동은 뒤의 모든 장에 다시 나온다.</a:t>
             </a:r>
           </a:p>
         </p:txBody>
@@ -4265,7 +4265,7 @@
           <a:lstStyle/>
           <a:p>
             <a:r>
-              <a:t>보상과 수익을 구별하는 것이 첫걸음이다. 보상은 한 스텝의 점수이고, 수익은 앞으로 받을 보상을 할인해 더한 것이다. 가치는 수익의 기댓값이다. V는 상태만, Q는 상태와 행동을 함께 평가한다. 이점은 Q에서 V를 뺀 값으로, 0보다 크면 평균보다 좋은 행동이다. 정책 기울기와 오프라인 RL에서 이점이 계속 나오므로 이 장에서 확실히 해 두자.</a:t>
+              <a:t>보상과 수익을 구별하는 것이 첫걸음이다. 보상은 한 스텝의 점수이고, 수익은 앞으로 받을 보상을 할인해 더한 것이다. 가치는 수익의 기댓값이다. V는 상태만, Q는 상태와 행동을 함께 평가한다. advantage는 Q에서 V를 뺀 값으로, 0보다 크면 평균보다 좋은 행동이다. 정책 기울기와 오프라인 RL에서 advantage가 계속 나오므로 이 장에서 확실히 해 두자.</a:t>
             </a:r>
           </a:p>
         </p:txBody>
@@ -8453,7 +8453,7 @@
                 <a:ea typeface="Malgun Gothic"/>
                 <a:cs typeface="Malgun Gothic"/>
               </a:rPr>
-              <a:t>와 유효 지평 </a:t>
+              <a:t>와 유효 horizon </a:t>
             </a:r>
             <a:r>
               <a:rPr sz="950" b="0" i="1">
@@ -9950,7 +9950,7 @@
                 <a:ea typeface="Malgun Gothic"/>
                 <a:cs typeface="Malgun Gothic"/>
               </a:rPr>
-              <a:t>(a) 10팔 밴딧에서 네 전략의 누적 후회(낮을수록 좋다) (b) UCB는 덜 해 본 팔에 낙관 보너스를 더해 고른다</a:t>
+              <a:t>(a) 10-armed 밴딧에서 네 전략의 누적 regret(낮을수록 좋다) (b) UCB는 덜 해 본 arm에 낙관 보너스를 더해 고른다</a:t>
             </a:r>
           </a:p>
         </p:txBody>
@@ -10212,7 +10212,7 @@
                 <a:ea typeface="Malgun Gothic"/>
                 <a:cs typeface="Malgun Gothic"/>
               </a:rPr>
-              <a:t>ε 확률로 아무거나</a:t>
+              <a:t>ε 확률로 무작위 행동</a:t>
             </a:r>
           </a:p>
         </p:txBody>
@@ -10555,7 +10555,7 @@
                 <a:ea typeface="Malgun Gothic"/>
                 <a:cs typeface="Malgun Gothic"/>
               </a:rPr>
-              <a:t>모를수록 후하게</a:t>
+              <a:t>불확실할수록 낙관적으로</a:t>
             </a:r>
           </a:p>
         </p:txBody>
@@ -10898,7 +10898,7 @@
                 <a:ea typeface="Malgun Gothic"/>
                 <a:cs typeface="Malgun Gothic"/>
               </a:rPr>
-              <a:t>믿음에서 뽑아서</a:t>
+              <a:t>사후분포에서 샘플링</a:t>
             </a:r>
           </a:p>
         </p:txBody>
@@ -11271,7 +11271,7 @@
                 <a:ea typeface="Malgun Gothic"/>
                 <a:cs typeface="Malgun Gothic"/>
               </a:rPr>
-              <a:t>(a) 시연 띠 밖에서 틀린 정책은 한 번 벗어나면 돌아오지 못한다 (b) 실수 확률 ε이 작아도 누적 실수는 지평 T의 제곱으로 는다(DAgger는 선형) (c) 왼쪽·오른쪽 회피 시연을 평균하면 장애물로 간다</a:t>
+              <a:t>(a) 시연 궤적의 범위 밖에서 틀린 정책은 한 번 벗어나면 돌아오지 못한다 (b) 실수 확률 ε이 작아도 누적 실수는 horizon T의 제곱으로 는다(DAgger는 선형) (c) 왼쪽·오른쪽 회피 시연을 평균하면 장애물로 간다</a:t>
             </a:r>
           </a:p>
         </p:txBody>
@@ -11574,7 +11574,7 @@
         </p:nvGraphicFramePr>
         <p:xfrm>
           <a:off x="711200" y="1361678"/>
-          <a:ext cx="10769601" cy="2354238"/>
+          <a:ext cx="10769600" cy="2354238"/>
         </p:xfrm>
         <a:graphic>
           <a:graphicData uri="http://schemas.openxmlformats.org/drawingml/2006/table">
@@ -11583,10 +11583,10 @@
                 <a:tableStyleId>{5C22544A-7EE6-4342-B048-85BDC9FD1C3A}</a:tableStyleId>
               </a:tblPr>
               <a:tblGrid>
-                <a:gridCol w="1363266"/>
-                <a:gridCol w="3044726"/>
-                <a:gridCol w="2728119"/>
-                <a:gridCol w="3633490"/>
+                <a:gridCol w="1493044"/>
+                <a:gridCol w="2866628"/>
+                <a:gridCol w="2513310"/>
+                <a:gridCol w="3896618"/>
               </a:tblGrid>
               <a:tr h="314657">
                 <a:tc>
@@ -11773,7 +11773,7 @@
                           <a:ea typeface="Malgun Gothic"/>
                           <a:cs typeface="Malgun Gothic"/>
                         </a:rPr>
-                        <a:t>분포 이동, 다봉 평균, 시연자보다 못 나아진다</a:t>
+                        <a:t>분포 이동, 여러 모드의 평균, 시연자를 넘지 못한다</a:t>
                       </a:r>
                     </a:p>
                   </a:txBody>
@@ -11969,7 +11969,7 @@
                           <a:ea typeface="Malgun Gothic"/>
                           <a:cs typeface="Malgun Gothic"/>
                         </a:rPr>
-                        <a:t>안쪽에 RL을 돌려 비싸다. 보상이 하나로 정해지지 않는다</a:t>
+                        <a:t>inner loop에 RL이 들어가 비싸다. 보상이 하나로 정해지지 않는다</a:t>
                       </a:r>
                     </a:p>
                   </a:txBody>
@@ -11995,7 +11995,7 @@
                           <a:ea typeface="Malgun Gothic"/>
                           <a:cs typeface="Malgun Gothic"/>
                         </a:rPr>
-                        <a:t>BC + RL 미세조정</a:t>
+                        <a:t>BC + RL fine-tuning</a:t>
                       </a:r>
                     </a:p>
                   </a:txBody>
@@ -12019,7 +12019,7 @@
                           <a:ea typeface="Malgun Gothic"/>
                           <a:cs typeface="Malgun Gothic"/>
                         </a:rPr>
-                        <a:t>BC로 시작하고 보상으로 다듬는다</a:t>
+                        <a:t>BC로 시작하고 보상으로 fine-tuning한다</a:t>
                       </a:r>
                     </a:p>
                   </a:txBody>
@@ -12067,7 +12067,7 @@
                           <a:ea typeface="Malgun Gothic"/>
                           <a:cs typeface="Malgun Gothic"/>
                         </a:rPr>
-                        <a:t>RL 단계에서 BC의 장점을 잃지 않게 묶어야 한다</a:t>
+                        <a:t>RL 단계에서 BC 정책에서 멀어지지 않게 제약해야 한다</a:t>
                       </a:r>
                     </a:p>
                   </a:txBody>
@@ -12244,7 +12244,7 @@
                 <a:ea typeface="Malgun Gothic"/>
                 <a:cs typeface="Malgun Gothic"/>
               </a:rPr>
-              <a:t>보상도 환경도 미분하지 않는다. 대가는 큰 분산이고, 이 장은 그 분산을 줄이는 요령들이다.</a:t>
+              <a:t>보상도 환경도 미분하지 않는다. 대가는 큰 분산이고, 이 장은 그 분산을 줄이는 기법들이다.</a:t>
             </a:r>
           </a:p>
         </p:txBody>
@@ -12311,7 +12311,7 @@
                 <a:ea typeface="Malgun Gothic"/>
                 <a:cs typeface="Malgun Gothic"/>
               </a:rPr>
-              <a:t>2 · 배경지식 · 로그 미분 요령</a:t>
+              <a:t>2 · 배경지식 · 로그 미분 트릭</a:t>
             </a:r>
           </a:p>
         </p:txBody>
@@ -12352,7 +12352,7 @@
                 <a:ea typeface="Malgun Gothic"/>
                 <a:cs typeface="Malgun Gothic"/>
               </a:rPr>
-              <a:t>로그 미분 요령 하나로 환경을 미분하지 않고도 기울기를 얻는다</a:t>
+              <a:t>로그 미분 트릭 하나로 환경을 미분하지 않고도 gradient를 얻는다</a:t>
             </a:r>
           </a:p>
         </p:txBody>
@@ -13422,7 +13422,7 @@
                 <a:ea typeface="Malgun Gothic"/>
                 <a:cs typeface="Malgun Gothic"/>
               </a:rPr>
-              <a:t>(a) 표본 16개로 낸 기울기 추정: 기준선이 없으면 표준편차 5.8, 배치 평균을 빼면 1.6. 평균은 둘 다 참값 4 (b) seed 20개의 학습 곡선</a:t>
+              <a:t>(a) 샘플 16개로 낸 기울기 추정: 기준선이 없으면 표준편차 5.8, 배치 평균을 빼면 1.6. 평균은 둘 다 참값 4 (b) seed 20개의 학습 곡선</a:t>
             </a:r>
           </a:p>
         </p:txBody>
@@ -13946,7 +13946,7 @@
                 <a:ea typeface="Malgun Gothic"/>
                 <a:cs typeface="Malgun Gothic"/>
               </a:rPr>
-              <a:t>분산이 커서 표본이 많이 든다. on-policy라 한 번 고치면 자료를 버린다.</a:t>
+              <a:t>분산이 커서 샘플이 많이 든다. on-policy라 한 번 고치면 데이터를 버린다.</a:t>
             </a:r>
           </a:p>
         </p:txBody>
@@ -14598,7 +14598,7 @@
                 <a:ea typeface="Malgun Gothic"/>
                 <a:cs typeface="Malgun Gothic"/>
               </a:rPr>
-              <a:t>② 굴리기</a:t>
+              <a:t>② rollout</a:t>
             </a:r>
           </a:p>
         </p:txBody>
@@ -15259,7 +15259,7 @@
                 <a:ea typeface="Malgun Gothic"/>
                 <a:cs typeface="Malgun Gothic"/>
               </a:rPr>
-              <a:t>작업자 사이에 잡음 seed만 주고받아 병렬이 쉽다</a:t>
+              <a:t>worker 사이에 잡음 seed만 주고받아 병렬이 쉽다</a:t>
             </a:r>
           </a:p>
         </p:txBody>
@@ -15523,7 +15523,7 @@
                 <a:ea typeface="Malgun Gothic"/>
                 <a:cs typeface="Malgun Gothic"/>
               </a:rPr>
-              <a:t>파라미터가 많으면 필요한 표본이 크게 는다</a:t>
+              <a:t>파라미터가 많으면 필요한 샘플이 크게 는다</a:t>
             </a:r>
           </a:p>
         </p:txBody>
@@ -15566,7 +15566,7 @@
                 <a:ea typeface="Malgun Gothic"/>
                 <a:cs typeface="Malgun Gothic"/>
               </a:rPr>
-              <a:t>스텝별 정보를 버려 표본 효율이 가장 낮은 편이다</a:t>
+              <a:t>스텝별 정보를 버려 샘플 효율이 가장 낮은 편이다</a:t>
             </a:r>
           </a:p>
         </p:txBody>
@@ -16201,7 +16201,7 @@
                           <a:ea typeface="Malgun Gothic"/>
                           <a:cs typeface="Malgun Gothic"/>
                         </a:rPr>
-                        <a:t>Q를 배우면 무엇이 좋고, 고정된 자료로만 배우면 무엇이 깨지나?</a:t>
+                        <a:t>Q를 배우면 무엇이 좋고, 고정된 데이터로만 배우면 무엇이 깨지나?</a:t>
                       </a:r>
                     </a:p>
                   </a:txBody>
@@ -16995,7 +16995,7 @@
                 <a:ea typeface="Malgun Gothic"/>
                 <a:cs typeface="Malgun Gothic"/>
               </a:rPr>
-              <a:t>21칸 무작위 보행에서 일부러 틀리게 만든 critic으로 잰 λ별 이점 추정의 편향과 분산. 흔히 0.95 안팎을 쓴다</a:t>
+              <a:t>상태 21개의 random walk에서 일부러 틀리게 만든 critic으로 잰 λ별 advantage 추정의 편향과 분산. 흔히 0.95 안팎을 쓴다</a:t>
             </a:r>
           </a:p>
         </p:txBody>
@@ -17200,7 +17200,7 @@
                 <a:ea typeface="Malgun Gothic"/>
                 <a:cs typeface="Malgun Gothic"/>
               </a:rPr>
-              <a:t>PPO는 확률 비율을 잘라 한 번에 너무 멀리 가지 않게 한다</a:t>
+              <a:t>PPO는 확률 비율을 clip해 한 번에 너무 멀리 가지 않게 한다</a:t>
             </a:r>
           </a:p>
         </p:txBody>
@@ -17384,7 +17384,7 @@
                 <a:ea typeface="Malgun Gothic"/>
                 <a:cs typeface="Malgun Gothic"/>
               </a:rPr>
-              <a:t>(a)(b) ε = 0.2의 자른 목표: 이점이 양이면 1+ε에서, 음이면 1−ε에서 더 밀지 않는다 (c) 같은 KL 거리라도 파라미터 거리는 방향마다 다르다</a:t>
+              <a:t>(a)(b) ε = 0.2로 clip한 목적 함수: advantage가 양이면 1+ε에서, 음이면 1−ε에서 더 밀지 않는다 (c) 같은 KL 거리라도 파라미터 거리는 방향마다 다르다</a:t>
             </a:r>
           </a:p>
         </p:txBody>
@@ -17646,7 +17646,7 @@
                 <a:ea typeface="Malgun Gothic"/>
                 <a:cs typeface="Malgun Gothic"/>
               </a:rPr>
-              <a:t>구현이 쉽고 하이퍼파라미터에 덜 민감하다. 병렬 시뮬과 잘 맞아 보행·조작·언어 모델 미세조정의 표준이 됐다.</a:t>
+              <a:t>구현이 쉽고 하이퍼파라미터에 덜 민감하다. 병렬 시뮬과 잘 맞아 보행·조작·언어 모델 fine-tuning의 표준이 됐다.</a:t>
             </a:r>
           </a:p>
         </p:txBody>
@@ -17908,7 +17908,7 @@
                 <a:ea typeface="Malgun Gothic"/>
                 <a:cs typeface="Malgun Gothic"/>
               </a:rPr>
-              <a:t>여전히 on-policy라 표본 효율이 낮다. 로그 확률이 필요해 diffusion·flow 정책에 바로 쓰기 어렵다.</a:t>
+              <a:t>여전히 on-policy라 샘플 효율이 낮다. log-probability가 필요해 diffusion·flow 정책에 바로 쓰기 어렵다.</a:t>
             </a:r>
           </a:p>
         </p:txBody>
@@ -18113,7 +18113,7 @@
                 <a:ea typeface="Malgun Gothic"/>
                 <a:cs typeface="Malgun Gothic"/>
               </a:rPr>
-              <a:t>정책 기울기 계열은 안정성을 얻는 대신 표본을 많이 쓴다</a:t>
+              <a:t>정책 기울기 계열은 안정성을 얻는 대신 샘플을 많이 쓴다</a:t>
             </a:r>
           </a:p>
         </p:txBody>
@@ -18128,7 +18128,7 @@
         </p:nvGraphicFramePr>
         <p:xfrm>
           <a:off x="711200" y="1361678"/>
-          <a:ext cx="10769601" cy="1844763"/>
+          <a:ext cx="10769600" cy="1844763"/>
         </p:xfrm>
         <a:graphic>
           <a:graphicData uri="http://schemas.openxmlformats.org/drawingml/2006/table">
@@ -18137,10 +18137,10 @@
                 <a:tableStyleId>{5C22544A-7EE6-4342-B048-85BDC9FD1C3A}</a:tableStyleId>
               </a:tblPr>
               <a:tblGrid>
-                <a:gridCol w="1617266"/>
-                <a:gridCol w="2831207"/>
-                <a:gridCol w="2980234"/>
-                <a:gridCol w="3340894"/>
+                <a:gridCol w="1521916"/>
+                <a:gridCol w="2668191"/>
+                <a:gridCol w="3094038"/>
+                <a:gridCol w="3485455"/>
               </a:tblGrid>
               <a:tr h="314657">
                 <a:tc>
@@ -18475,7 +18475,7 @@
                           <a:ea typeface="Malgun Gothic"/>
                           <a:cs typeface="Malgun Gothic"/>
                         </a:rPr>
-                        <a:t>critic의 이점</a:t>
+                        <a:t>critic의 advantage</a:t>
                       </a:r>
                     </a:p>
                   </a:txBody>
@@ -18573,7 +18573,7 @@
                           <a:ea typeface="Malgun Gothic"/>
                           <a:cs typeface="Malgun Gothic"/>
                         </a:rPr>
-                        <a:t>KL 제약 아래 이점</a:t>
+                        <a:t>KL 제약 아래 advantage</a:t>
                       </a:r>
                     </a:p>
                   </a:txBody>
@@ -18671,7 +18671,7 @@
                           <a:ea typeface="Malgun Gothic"/>
                           <a:cs typeface="Malgun Gothic"/>
                         </a:rPr>
-                        <a:t>자른 비율 × 이점</a:t>
+                        <a:t>clip한 비율 × advantage</a:t>
                       </a:r>
                     </a:p>
                   </a:txBody>
@@ -18695,7 +18695,7 @@
                           <a:ea typeface="Malgun Gothic"/>
                           <a:cs typeface="Malgun Gothic"/>
                         </a:rPr>
-                        <a:t>쉽고 튼튼하다, 사실상 표준</a:t>
+                        <a:t>쉽고 robust하다, 사실상 표준</a:t>
                       </a:r>
                     </a:p>
                   </a:txBody>
@@ -18719,7 +18719,7 @@
                           <a:ea typeface="Malgun Gothic"/>
                           <a:cs typeface="Malgun Gothic"/>
                         </a:rPr>
-                        <a:t>on-policy, 로그 확률 필요</a:t>
+                        <a:t>on-policy, log-probability 필요</a:t>
                       </a:r>
                     </a:p>
                   </a:txBody>
@@ -18834,7 +18834,7 @@
                 <a:ea typeface="Malgun Gothic"/>
                 <a:cs typeface="Malgun Gothic"/>
               </a:rPr>
-              <a:t> 방금 모은 자료만 쓰므로 표본이 많이 든다.</a:t>
+              <a:t> 방금 모은 데이터만 쓰므로 샘플이 많이 든다.</a:t>
             </a:r>
           </a:p>
         </p:txBody>
@@ -18942,7 +18942,7 @@
                 <a:ea typeface="Malgun Gothic"/>
                 <a:cs typeface="Malgun Gothic"/>
               </a:rPr>
-              <a:t>가치를 배우면 자료를 다시 쓸 수 있지만</a:t>
+              <a:t>가치를 배우면 데이터를 다시 쓸 수 있지만</a:t>
             </a:r>
           </a:p>
           <a:p>
@@ -19001,7 +19001,7 @@
                 <a:ea typeface="Malgun Gothic"/>
                 <a:cs typeface="Malgun Gothic"/>
               </a:rPr>
-              <a:t>새 상호작용 없이 모은 자료로만 배우면 그 오차를 바로잡을 길이 없다.</a:t>
+              <a:t>새 상호작용 없이 모은 데이터로만 배우면 그 오차를 바로잡을 길이 없다.</a:t>
             </a:r>
           </a:p>
         </p:txBody>
@@ -19293,7 +19293,7 @@
                 <a:ea typeface="Malgun Gothic"/>
                 <a:cs typeface="Malgun Gothic"/>
               </a:rPr>
-              <a:t>(a) 표 Q-learning의 학습 곡선 (b) 수렴한 가치와 정책 (c) 참 Q가 모두 0이어도 추정에 잡음이 있으면 max는 위로 치우친다. 행동이 많을수록 더 심하다. Double Q는 이를 거의 없앤다</a:t>
+              <a:t>(a) tabular Q-learning의 학습 곡선 (b) 수렴한 가치와 정책 (c) 참 Q가 모두 0이어도 추정에 잡음이 있으면 max는 위로 치우친다. 행동이 많을수록 더 심하다. Double Q는 이를 거의 없앤다</a:t>
             </a:r>
           </a:p>
         </p:txBody>
@@ -19555,7 +19555,7 @@
                 <a:ea typeface="Malgun Gothic"/>
                 <a:cs typeface="Malgun Gothic"/>
               </a:rPr>
-              <a:t>off-policy라 쌓아 둔 자료를 계속 다시 쓴다. 표본 효율이 높다.</a:t>
+              <a:t>off-policy라 쌓아 둔 데이터를 계속 다시 쓴다. 샘플 효율이 높다.</a:t>
             </a:r>
           </a:p>
         </p:txBody>
@@ -20088,7 +20088,7 @@
         <p:spPr>
           <a:xfrm>
             <a:off x="927100" y="1507728"/>
-            <a:ext cx="660995" cy="241300"/>
+            <a:ext cx="1229023" cy="241300"/>
           </a:xfrm>
           <a:prstGeom prst="roundRect">
             <a:avLst>
@@ -20119,7 +20119,7 @@
         <p:spPr>
           <a:xfrm>
             <a:off x="1016000" y="1533128"/>
-            <a:ext cx="523091" cy="288925"/>
+            <a:ext cx="1108159" cy="288925"/>
           </a:xfrm>
           <a:prstGeom prst="rect">
             <a:avLst/>
@@ -20146,7 +20146,7 @@
                 <a:ea typeface="Malgun Gothic"/>
                 <a:cs typeface="Malgun Gothic"/>
               </a:rPr>
-              <a:t>경험 재생</a:t>
+              <a:t>experience replay</a:t>
             </a:r>
           </a:p>
         </p:txBody>
@@ -20187,7 +20187,7 @@
                 <a:ea typeface="Malgun Gothic"/>
                 <a:cs typeface="Malgun Gothic"/>
               </a:rPr>
-              <a:t>자료를 버퍼에 쌓고 무작위로 뽑는다</a:t>
+              <a:t>데이터를 버퍼에 쌓고 무작위로 뽑는다</a:t>
             </a:r>
           </a:p>
         </p:txBody>
@@ -20228,7 +20228,7 @@
                 <a:ea typeface="Malgun Gothic"/>
                 <a:cs typeface="Malgun Gothic"/>
               </a:rPr>
-              <a:t>연속된 표본의 상관을 끊고, 한 번 모은 자료를 여러 번 쓴다.</a:t>
+              <a:t>연속된 샘플의 상관을 끊고, 한 번 모은 데이터를 여러 번 쓴다.</a:t>
             </a:r>
           </a:p>
         </p:txBody>
@@ -20391,7 +20391,7 @@
         <p:spPr>
           <a:xfrm>
             <a:off x="4567734" y="1507728"/>
-            <a:ext cx="517723" cy="241300"/>
+            <a:ext cx="887512" cy="241300"/>
           </a:xfrm>
           <a:prstGeom prst="roundRect">
             <a:avLst>
@@ -20422,7 +20422,7 @@
         <p:spPr>
           <a:xfrm>
             <a:off x="4656634" y="1533128"/>
-            <a:ext cx="375521" cy="288925"/>
+            <a:ext cx="756403" cy="288925"/>
           </a:xfrm>
           <a:prstGeom prst="rect">
             <a:avLst/>
@@ -20449,7 +20449,7 @@
                 <a:ea typeface="Malgun Gothic"/>
                 <a:cs typeface="Malgun Gothic"/>
               </a:rPr>
-              <a:t>목표망</a:t>
+              <a:t>타깃 네트워크</a:t>
             </a:r>
           </a:p>
         </p:txBody>
@@ -20553,7 +20553,7 @@
                 <a:ea typeface="Malgun Gothic"/>
                 <a:cs typeface="Malgun Gothic"/>
               </a:rPr>
-              <a:t>맞출 과녁이 매 스텝 움직이는 것을 막는다.</a:t>
+              <a:t>회귀 타깃이 매 스텝 움직이는 것을 막는다.</a:t>
             </a:r>
           </a:p>
         </p:txBody>
@@ -20788,7 +20788,7 @@
         <p:spPr>
           <a:xfrm>
             <a:off x="8208367" y="1825228"/>
-            <a:ext cx="3219310" cy="339651"/>
+            <a:ext cx="3219310" cy="628501"/>
           </a:xfrm>
           <a:prstGeom prst="rect">
             <a:avLst/>
@@ -20815,7 +20815,7 @@
                 <a:ea typeface="Malgun Gothic"/>
                 <a:cs typeface="Malgun Gothic"/>
               </a:rPr>
-              <a:t>행동 고르기와 값 매기기를 다른 망이 한다</a:t>
+              <a:t>행동 고르기와 값 매기기를 다른 네트워크가 한다</a:t>
             </a:r>
           </a:p>
         </p:txBody>
@@ -20828,7 +20828,7 @@
         </p:nvSpPr>
         <p:spPr>
           <a:xfrm>
-            <a:off x="8208367" y="2132509"/>
+            <a:off x="8208367" y="2363589"/>
             <a:ext cx="3219310" cy="327000"/>
           </a:xfrm>
           <a:prstGeom prst="rect">
@@ -21163,7 +21163,7 @@
                 <a:ea typeface="Malgun Gothic"/>
                 <a:cs typeface="Malgun Gothic"/>
               </a:rPr>
-              <a:t>off-policy라 표본 효율이 높다</a:t>
+              <a:t>off-policy라 샘플 효율이 높다</a:t>
             </a:r>
           </a:p>
         </p:txBody>
@@ -21553,7 +21553,7 @@
                 <a:ea typeface="Malgun Gothic"/>
                 <a:cs typeface="Malgun Gothic"/>
               </a:rPr>
-              <a:t> 함수 근사 + 부트스트랩 + off-policy가 겹치면 발산할 수 있다("치명적 세 가지").</a:t>
+              <a:t> 함수 근사 + 부트스트랩 + off-policy가 겹치면 발산할 수 있다(deadly triad).</a:t>
             </a:r>
           </a:p>
         </p:txBody>
@@ -21758,7 +21758,7 @@
                 <a:ea typeface="Malgun Gothic"/>
                 <a:cs typeface="Malgun Gothic"/>
               </a:rPr>
-              <a:t>on-policy는 방금 모은 자료만, off-policy는 쌓아 둔 자료도 쓴다</a:t>
+              <a:t>on-policy는 방금 모은 데이터만, off-policy는 쌓아 둔 데이터도 쓴다</a:t>
             </a:r>
           </a:p>
         </p:txBody>
@@ -22445,7 +22445,7 @@
                 <a:ea typeface="Malgun Gothic"/>
                 <a:cs typeface="Malgun Gothic"/>
               </a:rPr>
-              <a:t>자료 버림</a:t>
+              <a:t>데이터 버림</a:t>
             </a:r>
           </a:p>
         </p:txBody>
@@ -22969,7 +22969,7 @@
                 <a:ea typeface="Malgun Gothic"/>
                 <a:cs typeface="Malgun Gothic"/>
               </a:rPr>
-              <a:t>표본을 한 번(또는 몇 번)만 쓴다.</a:t>
+              <a:t>샘플을 한 번(또는 몇 번)만 쓴다.</a:t>
             </a:r>
           </a:p>
         </p:txBody>
@@ -23427,7 +23427,7 @@
                 <a:ea typeface="Malgun Gothic"/>
                 <a:cs typeface="Malgun Gothic"/>
               </a:rPr>
-              <a:t>재생 버퍼</a:t>
+              <a:t>리플레이 버퍼</a:t>
             </a:r>
           </a:p>
         </p:txBody>
@@ -23918,7 +23918,7 @@
                 <a:ea typeface="Malgun Gothic"/>
                 <a:cs typeface="Malgun Gothic"/>
               </a:rPr>
-              <a:t>표본 효율이 높고 시연·옛 자료도 섞을 수 있다.</a:t>
+              <a:t>샘플 효율이 높고 시연·옛 데이터도 섞을 수 있다.</a:t>
             </a:r>
           </a:p>
         </p:txBody>
@@ -24180,7 +24180,7 @@
                 <a:ea typeface="Malgun Gothic"/>
                 <a:cs typeface="Malgun Gothic"/>
               </a:rPr>
-              <a:t>critic이 자료 밖에서 틀리면 막을 장치가 따로 필요하다.</a:t>
+              <a:t>critic이 데이터 분포 밖에서 틀리면 막을 장치가 따로 필요하다.</a:t>
             </a:r>
           </a:p>
         </p:txBody>
@@ -24263,7 +24263,7 @@
                 <a:ea typeface="Malgun Gothic"/>
                 <a:cs typeface="Malgun Gothic"/>
               </a:rPr>
-              <a:t> 이 구분은 "누가 모은 자료로 배워도 되나"의 질문이다. 끝까지 가면 새 수집이 없는 오프라인 RL이 된다.</a:t>
+              <a:t> 이 구분은 "누가 모은 데이터로 배워도 되나"의 질문이다. 끝까지 가면 새 수집이 없는 오프라인 RL이 된다.</a:t>
             </a:r>
           </a:p>
         </p:txBody>
@@ -24371,7 +24371,7 @@
                 <a:ea typeface="Malgun Gothic"/>
                 <a:cs typeface="Malgun Gothic"/>
               </a:rPr>
-              <a:t>오프라인 RL은 자료 밖 행동의 가치를 믿지 않는 법을 배운다</a:t>
+              <a:t>오프라인 RL은 데이터 밖 행동의 가치를 믿지 않는 법을 배운다</a:t>
             </a:r>
           </a:p>
         </p:txBody>
@@ -24685,7 +24685,7 @@
                 <a:ea typeface="Malgun Gothic"/>
                 <a:cs typeface="Malgun Gothic"/>
               </a:rPr>
-              <a:t>자료에 있는 행동만, 좋았던 만큼 무게를 실어 따라 한다</a:t>
+              <a:t>데이터에 있는 행동만, 좋았던 만큼 무게를 실어 따라 한다</a:t>
             </a:r>
           </a:p>
         </p:txBody>
@@ -24999,7 +24999,7 @@
                 <a:ea typeface="Malgun Gothic"/>
                 <a:cs typeface="Malgun Gothic"/>
               </a:rPr>
-              <a:t>Q를 배울 때 자료 밖 행동의 값을 벌점으로 끌어내린다</a:t>
+              <a:t>Q를 배울 때 데이터 밖 행동의 값을 페널티로 끌어내린다</a:t>
             </a:r>
           </a:p>
         </p:txBody>
@@ -25162,7 +25162,7 @@
         <p:spPr>
           <a:xfrm>
             <a:off x="927100" y="4012009"/>
-            <a:ext cx="917476" cy="241300"/>
+            <a:ext cx="1140520" cy="241300"/>
           </a:xfrm>
           <a:prstGeom prst="roundRect">
             <a:avLst>
@@ -25193,7 +25193,7 @@
         <p:spPr>
           <a:xfrm>
             <a:off x="1016000" y="4037409"/>
-            <a:ext cx="787266" cy="288925"/>
+            <a:ext cx="1017001" cy="288925"/>
           </a:xfrm>
           <a:prstGeom prst="rect">
             <a:avLst/>
@@ -25220,7 +25220,7 @@
                 <a:ea typeface="Malgun Gothic"/>
                 <a:cs typeface="Malgun Gothic"/>
               </a:rPr>
-              <a:t>표본 안 기댓값</a:t>
+              <a:t>in-sample 기댓값</a:t>
             </a:r>
           </a:p>
         </p:txBody>
@@ -25313,7 +25313,7 @@
                 <a:ea typeface="Malgun Gothic"/>
                 <a:cs typeface="Malgun Gothic"/>
               </a:rPr>
-              <a:t>자료 밖 행동은 묻지 않고, 자료 안 행동의 높은 쪽 값으로 배운다</a:t>
+              <a:t>데이터 밖 행동은 묻지 않고, 데이터 안 행동의 높은 쪽 값으로 배운다</a:t>
             </a:r>
           </a:p>
         </p:txBody>
@@ -25411,7 +25411,7 @@
                 <a:ea typeface="Malgun Gothic"/>
                 <a:cs typeface="Malgun Gothic"/>
               </a:rPr>
-              <a:t>한 상태의 오프라인 문제. 그냥 맞춘 Q는 자료 없는 a=−2.00을 고르고 참 보상은 0.00이다. 보수적 Q는 +0.15(참 0.99), AWR은 +0.12(참 0.98)를 고른다</a:t>
+              <a:t>한 상태의 오프라인 문제. 그냥 맞춘 Q는 데이터 없는 a=−2.00을 고르고 참 보상은 0.00이다. 보수적 Q는 +0.15(참 0.99), AWR은 +0.12(참 0.98)를 고른다</a:t>
             </a:r>
           </a:p>
         </p:txBody>
@@ -25494,7 +25494,7 @@
                 <a:ea typeface="Malgun Gothic"/>
                 <a:cs typeface="Malgun Gothic"/>
               </a:rPr>
-              <a:t> 새로 시도해 볼 수 없으니, 자료가 없는 곳에서 회귀가 내놓은 "높은 값"을 고치지 못한다.</a:t>
+              <a:t> 새로 시도해 볼 수 없으니, 데이터가 없는 곳에서 회귀가 내놓은 "높은 값"을 고치지 못한다.</a:t>
             </a:r>
           </a:p>
         </p:txBody>
@@ -25699,7 +25699,7 @@
                 <a:ea typeface="Malgun Gothic"/>
                 <a:cs typeface="Malgun Gothic"/>
               </a:rPr>
-              <a:t>AWR은 이점의 지수로 가중한 행동 복제다</a:t>
+              <a:t>AWR은 advantage의 지수로 가중한 행동 복제다</a:t>
             </a:r>
           </a:p>
         </p:txBody>
@@ -26047,7 +26047,7 @@
                 <a:ea typeface="Malgun Gothic"/>
                 <a:cs typeface="Malgun Gothic"/>
               </a:rPr>
-              <a:t>이점 +0.3, 0, −0.3, β = 0.15</a:t>
+              <a:t>advantage +0.3, 0, −0.3, β = 0.15</a:t>
             </a:r>
           </a:p>
         </p:txBody>
@@ -26413,7 +26413,7 @@
                 <a:ea typeface="Malgun Gothic"/>
                 <a:cs typeface="Malgun Gothic"/>
               </a:rPr>
-              <a:t>지도학습 손실에 가중치만 곱하면 된다. 어떤 정책 구조(가우시안, diffusion, flow)에도 붙는다. 자료 밖 행동을 만들지 않아 안전하다.</a:t>
+              <a:t>지도학습 손실에 가중치만 곱하면 된다. 어떤 정책 구조(가우시안, diffusion, flow)에도 붙는다. 데이터 밖 행동을 만들지 않아 안전하다.</a:t>
             </a:r>
           </a:p>
         </p:txBody>
@@ -26675,7 +26675,7 @@
                 <a:ea typeface="Malgun Gothic"/>
                 <a:cs typeface="Malgun Gothic"/>
               </a:rPr>
-              <a:t>자료에 없는 더 좋은 행동은 끝내 찾지 못한다. β가 작으면 소수 표본에 몰려 분산이 커진다.</a:t>
+              <a:t>데이터에 없는 더 좋은 행동은 끝내 찾지 못한다. β가 작으면 소수 샘플에 몰려 분산이 커진다.</a:t>
             </a:r>
           </a:p>
         </p:txBody>
@@ -26783,7 +26783,7 @@
                 <a:ea typeface="Malgun Gothic"/>
                 <a:cs typeface="Malgun Gothic"/>
               </a:rPr>
-              <a:t>CQL은 자료 밖 행동의 Q를 벌점으로 끌어내린다</a:t>
+              <a:t>CQL은 데이터 밖 행동의 Q를 페널티로 끌어내린다</a:t>
             </a:r>
           </a:p>
         </p:txBody>
@@ -26883,11 +26883,11 @@
         <p:spPr>
           <a:xfrm>
             <a:off x="711200" y="2197298"/>
-            <a:ext cx="5257800" cy="1358801"/>
+            <a:ext cx="5257800" cy="1579761"/>
           </a:xfrm>
           <a:prstGeom prst="roundRect">
             <a:avLst>
-              <a:gd name="adj" fmla="val 5607"/>
+              <a:gd name="adj" fmla="val 4823"/>
             </a:avLst>
           </a:prstGeom>
           <a:solidFill>
@@ -26943,7 +26943,7 @@
         <p:spPr>
           <a:xfrm>
             <a:off x="5962650" y="2197298"/>
-            <a:ext cx="6350" cy="1358801"/>
+            <a:ext cx="6350" cy="1579761"/>
           </a:xfrm>
           <a:prstGeom prst="rect">
             <a:avLst/>
@@ -26971,7 +26971,7 @@
         </p:nvSpPr>
         <p:spPr>
           <a:xfrm>
-            <a:off x="711200" y="3549749"/>
+            <a:off x="711200" y="3770709"/>
             <a:ext cx="5257800" cy="6350"/>
           </a:xfrm>
           <a:prstGeom prst="rect">
@@ -27001,7 +27001,7 @@
         <p:spPr>
           <a:xfrm>
             <a:off x="711200" y="2197298"/>
-            <a:ext cx="50800" cy="1358801"/>
+            <a:ext cx="50800" cy="1579761"/>
           </a:xfrm>
           <a:prstGeom prst="roundRect">
             <a:avLst>
@@ -27131,7 +27131,7 @@
                 <a:ea typeface="Malgun Gothic"/>
                 <a:cs typeface="Malgun Gothic"/>
               </a:rPr>
-              <a:t>모든 행동은 누르고, 자료 행동은 올린다</a:t>
+              <a:t>모든 행동은 누르고, 데이터 행동은 올린다</a:t>
             </a:r>
           </a:p>
         </p:txBody>
@@ -27145,7 +27145,7 @@
         <p:spPr>
           <a:xfrm>
             <a:off x="927100" y="2968129"/>
-            <a:ext cx="5041964" cy="603200"/>
+            <a:ext cx="5041964" cy="879401"/>
           </a:xfrm>
           <a:prstGeom prst="rect">
             <a:avLst/>
@@ -27172,7 +27172,7 @@
                 <a:ea typeface="Malgun Gothic"/>
                 <a:cs typeface="Malgun Gothic"/>
               </a:rPr>
-              <a:t>앞 항(soft max)은 Q가 큰 행동일수록 세게 누르고, 뒤 항은 자료에 있는 행동만 다시 올린다. 자료 안에서는 둘이 거의 상쇄되어 </a:t>
+              <a:t>앞 항(soft max)은 Q가 큰 행동일수록 세게 누르고, 뒤 항은 데이터에 있는 행동만 다시 올린다. 데이터 안에서는 둘이 거의 상쇄되어 </a:t>
             </a:r>
             <a:r>
               <a:rPr sz="1150" b="1" i="0">
@@ -27183,7 +27183,7 @@
                 <a:ea typeface="Malgun Gothic"/>
                 <a:cs typeface="Malgun Gothic"/>
               </a:rPr>
-              <a:t>자료 밖에서만 값이 내려간다.</a:t>
+              <a:t>데이터 밖에서만 값이 내려간다.</a:t>
             </a:r>
           </a:p>
         </p:txBody>
@@ -27445,7 +27445,7 @@
                 <a:ea typeface="Malgun Gothic"/>
                 <a:cs typeface="Malgun Gothic"/>
               </a:rPr>
-              <a:t>Q = 0.5, 0.8, 1.5 · 1.5인 a₃는 자료에 없다</a:t>
+              <a:t>Q = 0.5, 0.8, 1.5 · 1.5인 a₃는 데이터에 없다</a:t>
             </a:r>
           </a:p>
         </p:txBody>
@@ -27486,7 +27486,7 @@
                 <a:ea typeface="Malgun Gothic"/>
                 <a:cs typeface="Malgun Gothic"/>
               </a:rPr>
-              <a:t>앞 항의 기울기는 softmax라 0.20, 0.27, 0.54다. 자료가 a₁과 a₂를 반씩 담으면 뒤 항은 0.5, 0.5, 0이다.</a:t>
+              <a:t>앞 항의 기울기는 softmax라 0.20, 0.27, 0.54다. 데이터가 a₁과 a₂를 반씩 담으면 뒤 항은 0.5, 0.5, 0이다.</a:t>
             </a:r>
           </a:p>
         </p:txBody>
@@ -27527,7 +27527,7 @@
                 <a:ea typeface="Malgun Gothic"/>
                 <a:cs typeface="Malgun Gothic"/>
               </a:rPr>
-              <a:t>벌점만 보면 Q가 움직이는 방향은 </a:t>
+              <a:t>페널티 항만 보면 Q가 움직이는 방향은 </a:t>
             </a:r>
             <a:r>
               <a:rPr sz="1150" b="1" i="0">
@@ -27563,11 +27563,11 @@
         <p:spPr>
           <a:xfrm>
             <a:off x="711200" y="4031059"/>
-            <a:ext cx="5308600" cy="1051520"/>
+            <a:ext cx="5308600" cy="830560"/>
           </a:xfrm>
           <a:prstGeom prst="roundRect">
             <a:avLst>
-              <a:gd name="adj" fmla="val 7246"/>
+              <a:gd name="adj" fmla="val 9174"/>
             </a:avLst>
           </a:prstGeom>
           <a:solidFill>
@@ -27623,7 +27623,7 @@
         <p:spPr>
           <a:xfrm>
             <a:off x="6013450" y="4031059"/>
-            <a:ext cx="6350" cy="1051520"/>
+            <a:ext cx="6350" cy="830560"/>
           </a:xfrm>
           <a:prstGeom prst="rect">
             <a:avLst/>
@@ -27651,7 +27651,7 @@
         </p:nvSpPr>
         <p:spPr>
           <a:xfrm>
-            <a:off x="711200" y="5076230"/>
+            <a:off x="711200" y="4855270"/>
             <a:ext cx="5308600" cy="6350"/>
           </a:xfrm>
           <a:prstGeom prst="rect">
@@ -27681,7 +27681,7 @@
         <p:spPr>
           <a:xfrm>
             <a:off x="711200" y="4031059"/>
-            <a:ext cx="50800" cy="1051520"/>
+            <a:ext cx="50800" cy="830560"/>
           </a:xfrm>
           <a:prstGeom prst="roundRect">
             <a:avLst>
@@ -27811,7 +27811,7 @@
                 <a:ea typeface="Malgun Gothic"/>
                 <a:cs typeface="Malgun Gothic"/>
               </a:rPr>
-              <a:t>Q가 참값보다 낮은 쪽(보수적)으로 배워져 자료 밖 행동에 속지 않는다.</a:t>
+              <a:t>Q가 참값보다 낮은 쪽(보수적)으로 배워져 데이터 밖 행동에 속지 않는다.</a:t>
             </a:r>
           </a:p>
         </p:txBody>
@@ -27825,11 +27825,11 @@
         <p:spPr>
           <a:xfrm>
             <a:off x="6172200" y="4031059"/>
-            <a:ext cx="5308600" cy="1051520"/>
+            <a:ext cx="5308600" cy="830560"/>
           </a:xfrm>
           <a:prstGeom prst="roundRect">
             <a:avLst>
-              <a:gd name="adj" fmla="val 7246"/>
+              <a:gd name="adj" fmla="val 9174"/>
             </a:avLst>
           </a:prstGeom>
           <a:solidFill>
@@ -27885,7 +27885,7 @@
         <p:spPr>
           <a:xfrm>
             <a:off x="11474450" y="4031059"/>
-            <a:ext cx="6350" cy="1051520"/>
+            <a:ext cx="6350" cy="830560"/>
           </a:xfrm>
           <a:prstGeom prst="rect">
             <a:avLst/>
@@ -27913,7 +27913,7 @@
         </p:nvSpPr>
         <p:spPr>
           <a:xfrm>
-            <a:off x="6172200" y="5076230"/>
+            <a:off x="6172200" y="4855270"/>
             <a:ext cx="5308600" cy="6350"/>
           </a:xfrm>
           <a:prstGeom prst="rect">
@@ -27943,7 +27943,7 @@
         <p:spPr>
           <a:xfrm>
             <a:off x="6172200" y="4031059"/>
-            <a:ext cx="50800" cy="1051520"/>
+            <a:ext cx="50800" cy="830560"/>
           </a:xfrm>
           <a:prstGeom prst="roundRect">
             <a:avLst>
@@ -28046,7 +28046,7 @@
         <p:spPr>
           <a:xfrm>
             <a:off x="6388100" y="4494609"/>
-            <a:ext cx="5094288" cy="603200"/>
+            <a:ext cx="5094288" cy="327000"/>
           </a:xfrm>
           <a:prstGeom prst="rect">
             <a:avLst/>
@@ -28073,7 +28073,7 @@
                 <a:ea typeface="Malgun Gothic"/>
                 <a:cs typeface="Malgun Gothic"/>
               </a:rPr>
-              <a:t>α가 크면 좋은 새 행동도 깎인다. 연속 행동은 앞 항을 표본으로 근사해 계산이 든다.</a:t>
+              <a:t>α가 크면 좋은 새 행동도 깎인다. 연속 행동은 앞 항을 샘플로 근사해 계산이 든다.</a:t>
             </a:r>
           </a:p>
         </p:txBody>
@@ -28859,7 +28859,7 @@
                 <a:ea typeface="Malgun Gothic"/>
                 <a:cs typeface="Malgun Gothic"/>
               </a:rPr>
-              <a:t>PPO·표본 효율 → 6 시뮬레이션의 병렬 학습. PPO·증류 → 7 다리 로봇의 보행 정책.</a:t>
+              <a:t>PPO·샘플 효율 → 6 시뮬레이션의 병렬 학습. PPO·증류 → 7 다리 로봇의 보행 정책.</a:t>
             </a:r>
           </a:p>
         </p:txBody>
@@ -29229,7 +29229,7 @@
                 <a:ea typeface="Malgun Gothic"/>
                 <a:cs typeface="Malgun Gothic"/>
               </a:rPr>
-              <a:t>IQL은 자료 밖 행동을 한 번도 묻지 않고 가치를 배운다</a:t>
+              <a:t>IQL은 데이터 밖 행동을 한 번도 묻지 않고 가치를 배운다</a:t>
             </a:r>
           </a:p>
         </p:txBody>
@@ -29618,7 +29618,7 @@
                 <a:ea typeface="Malgun Gothic"/>
                 <a:cs typeface="Malgun Gothic"/>
               </a:rPr>
-              <a:t>① V는 자료 안 행동들의 Q 중 높은 쪽(expectile τ)을 맞춘다.</a:t>
+              <a:t>① V는 데이터 안 행동들의 Q 중 높은 쪽(expectile τ)을 맞춘다.</a:t>
             </a:r>
           </a:p>
         </p:txBody>
@@ -29659,7 +29659,7 @@
                 <a:ea typeface="Malgun Gothic"/>
                 <a:cs typeface="Malgun Gothic"/>
               </a:rPr>
-              <a:t>② Q의 목표는 r + γV(s′)다. max가 없으니 자료 밖 행동을 묻지 않는다.</a:t>
+              <a:t>② Q의 목표는 r + γV(s′)다. max가 없으니 데이터 밖 행동을 묻지 않는다.</a:t>
             </a:r>
           </a:p>
         </p:txBody>
@@ -29962,7 +29962,7 @@
                 <a:ea typeface="Malgun Gothic"/>
                 <a:cs typeface="Malgun Gothic"/>
               </a:rPr>
-              <a:t>자료 행동의 Q = 0.2, 0.5, 0.9</a:t>
+              <a:t>데이터 행동의 Q = 0.2, 0.5, 0.9</a:t>
             </a:r>
           </a:p>
         </p:txBody>
@@ -30044,7 +30044,7 @@
                 <a:ea typeface="Malgun Gothic"/>
                 <a:cs typeface="Malgun Gothic"/>
               </a:rPr>
-              <a:t>τ를 1로 올릴수록 자료 안의 최댓값 0.9에 다가간다. </a:t>
+              <a:t>τ를 1로 올릴수록 데이터 안의 최댓값 0.9에 다가간다. </a:t>
             </a:r>
             <a:r>
               <a:rPr sz="1150" b="1" i="0">
@@ -30055,7 +30055,7 @@
                 <a:ea typeface="Malgun Gothic"/>
                 <a:cs typeface="Malgun Gothic"/>
               </a:rPr>
-              <a:t>자료 밖의 더 큰 값은 처음부터 계산에 없다.</a:t>
+              <a:t>데이터 밖의 더 큰 값은 처음부터 계산에 없다.</a:t>
             </a:r>
           </a:p>
         </p:txBody>
@@ -30317,7 +30317,7 @@
                 <a:ea typeface="Malgun Gothic"/>
                 <a:cs typeface="Malgun Gothic"/>
               </a:rPr>
-              <a:t>학습이 안정적이고 구현이 단순하다. 오프라인으로 배운 뒤 온라인 미세조정으로 이어 가기 쉽다.</a:t>
+              <a:t>학습이 안정적이고 구현이 단순하다. 오프라인으로 배운 뒤 온라인 fine-tuning으로 이어 가기 쉽다.</a:t>
             </a:r>
           </a:p>
         </p:txBody>
@@ -30552,7 +30552,7 @@
         <p:spPr>
           <a:xfrm>
             <a:off x="6388100" y="4376539"/>
-            <a:ext cx="5094288" cy="327000"/>
+            <a:ext cx="5094288" cy="603200"/>
           </a:xfrm>
           <a:prstGeom prst="rect">
             <a:avLst/>
@@ -30579,7 +30579,7 @@
                 <a:ea typeface="Malgun Gothic"/>
                 <a:cs typeface="Malgun Gothic"/>
               </a:rPr>
-              <a:t>자료에 없는 행동은 끝까지 고르지 못한다. τ와 β 두 손잡이를 맞춰야 한다.</a:t>
+              <a:t>데이터에 없는 행동은 끝까지 고르지 못한다. τ와 β 두 하이퍼파라미터를 맞춰야 한다.</a:t>
             </a:r>
           </a:p>
         </p:txBody>
@@ -30784,7 +30784,7 @@
                 <a:ea typeface="Malgun Gothic"/>
                 <a:cs typeface="Malgun Gothic"/>
               </a:rPr>
-              <a:t>자료 밖 행동을 AWR은 피하고, CQL은 깎고, IQL은 묻지 않는다</a:t>
+              <a:t>데이터 밖 행동을 AWR은 피하고, CQL은 깎고, IQL은 묻지 않는다</a:t>
             </a:r>
           </a:p>
         </p:txBody>
@@ -30799,7 +30799,7 @@
         </p:nvGraphicFramePr>
         <p:xfrm>
           <a:off x="711200" y="1361678"/>
-          <a:ext cx="10769600" cy="1231641"/>
+          <a:ext cx="10769599" cy="1231641"/>
         </p:xfrm>
         <a:graphic>
           <a:graphicData uri="http://schemas.openxmlformats.org/drawingml/2006/table">
@@ -30808,11 +30808,11 @@
                 <a:tableStyleId>{5C22544A-7EE6-4342-B048-85BDC9FD1C3A}</a:tableStyleId>
               </a:tblPr>
               <a:tblGrid>
-                <a:gridCol w="604937"/>
-                <a:gridCol w="3867845"/>
-                <a:gridCol w="959941"/>
-                <a:gridCol w="2580779"/>
-                <a:gridCol w="2756098"/>
+                <a:gridCol w="567134"/>
+                <a:gridCol w="4139902"/>
+                <a:gridCol w="899914"/>
+                <a:gridCol w="2419350"/>
+                <a:gridCol w="2743299"/>
               </a:tblGrid>
               <a:tr h="314657">
                 <a:tc>
@@ -30853,7 +30853,7 @@
                           <a:ea typeface="Malgun Gothic"/>
                           <a:cs typeface="Malgun Gothic"/>
                         </a:rPr>
-                        <a:t>자료 밖 행동을 다루는 법</a:t>
+                        <a:t>데이터 밖 행동을 다루는 법</a:t>
                       </a:r>
                     </a:p>
                   </a:txBody>
@@ -30901,7 +30901,7 @@
                           <a:ea typeface="Malgun Gothic"/>
                           <a:cs typeface="Malgun Gothic"/>
                         </a:rPr>
-                        <a:t>손잡이</a:t>
+                        <a:t>하이퍼파라미터</a:t>
                       </a:r>
                     </a:p>
                   </a:txBody>
@@ -30975,7 +30975,7 @@
                           <a:ea typeface="Malgun Gothic"/>
                           <a:cs typeface="Malgun Gothic"/>
                         </a:rPr>
-                        <a:t>정책이 자료의 행동만 이점으로 가중해 따라 한다</a:t>
+                        <a:t>정책이 데이터의 행동만 advantage로 가중해 따라 한다</a:t>
                       </a:r>
                     </a:p>
                   </a:txBody>
@@ -31047,7 +31047,7 @@
                           <a:ea typeface="Malgun Gothic"/>
                           <a:cs typeface="Malgun Gothic"/>
                         </a:rPr>
-                        <a:t>자료보다 멀리 가지 못한다</a:t>
+                        <a:t>데이터보다 멀리 가지 못한다</a:t>
                       </a:r>
                     </a:p>
                   </a:txBody>
@@ -31097,7 +31097,7 @@
                           <a:ea typeface="Malgun Gothic"/>
                           <a:cs typeface="Malgun Gothic"/>
                         </a:rPr>
-                        <a:t>Q 학습에 벌점을 더해 자료 밖 값을 깎는다</a:t>
+                        <a:t>Q 학습에 페널티를 더해 데이터 밖 값을 깎는다</a:t>
                       </a:r>
                     </a:p>
                   </a:txBody>
@@ -31145,7 +31145,7 @@
                           <a:ea typeface="Malgun Gothic"/>
                           <a:cs typeface="Malgun Gothic"/>
                         </a:rPr>
-                        <a:t>α: 벌점 세기</a:t>
+                        <a:t>α: 페널티 세기</a:t>
                       </a:r>
                     </a:p>
                   </a:txBody>
@@ -31219,7 +31219,7 @@
                           <a:ea typeface="Malgun Gothic"/>
                           <a:cs typeface="Malgun Gothic"/>
                         </a:rPr>
-                        <a:t>Q와 V를 자료 안 행동만으로 배운다</a:t>
+                        <a:t>Q와 V를 데이터 안 행동만으로 배운다</a:t>
                       </a:r>
                     </a:p>
                   </a:txBody>
@@ -31291,7 +31291,7 @@
                           <a:ea typeface="Malgun Gothic"/>
                           <a:cs typeface="Malgun Gothic"/>
                         </a:rPr>
-                        <a:t>자료에 없는 행동은 고르지 못한다</a:t>
+                        <a:t>데이터에 없는 행동은 고르지 못한다</a:t>
                       </a:r>
                     </a:p>
                   </a:txBody>
@@ -31646,7 +31646,7 @@
                 <a:ea typeface="Malgun Gothic"/>
                 <a:cs typeface="Malgun Gothic"/>
               </a:rPr>
-              <a:t> 자료가 좋고 단순함이 중요하면 AWR·IQL, 자료가 섞여 있고 과대평가가 걱정되면 CQL부터 시도한다.</a:t>
+              <a:t> 데이터가 좋고 단순함이 중요하면 AWR·IQL, 데이터가 섞여 있고 과대평가가 걱정되면 CQL부터 시도한다.</a:t>
             </a:r>
           </a:p>
         </p:txBody>
@@ -31813,7 +31813,7 @@
                 <a:ea typeface="Malgun Gothic"/>
                 <a:cs typeface="Malgun Gothic"/>
               </a:rPr>
-              <a:t>엔트로피와 온도가 탐색을 정하고, 모델을 알면 미리 굴려 보고 고를 수 있다. 대신 모델의 오차를 떠안는다.</a:t>
+              <a:t>엔트로피와 온도가 탐색을 정하고, 모델을 알면 미리 시뮬레이션해 보고 고를 수 있다. 대신 모델의 오차를 떠안는다.</a:t>
             </a:r>
           </a:p>
         </p:txBody>
@@ -32470,7 +32470,7 @@
                 <a:ea typeface="Malgun Gothic"/>
                 <a:cs typeface="Malgun Gothic"/>
               </a:rPr>
-              <a:t> 연속 행동에서 표본 효율과 안정성이 좋다. </a:t>
+              <a:t> 연속 행동에서 샘플 효율과 안정성이 좋다. </a:t>
             </a:r>
             <a:r>
               <a:rPr sz="1150" b="1" i="0">
@@ -32655,7 +32655,7 @@
         <p:spPr>
           <a:xfrm>
             <a:off x="6388100" y="2343348"/>
-            <a:ext cx="1144091" cy="241300"/>
+            <a:ext cx="1400572" cy="241300"/>
           </a:xfrm>
           <a:prstGeom prst="roundRect">
             <a:avLst>
@@ -32686,7 +32686,7 @@
         <p:spPr>
           <a:xfrm>
             <a:off x="6477000" y="2368748"/>
-            <a:ext cx="1020680" cy="288925"/>
+            <a:ext cx="1284855" cy="288925"/>
           </a:xfrm>
           <a:prstGeom prst="rect">
             <a:avLst/>
@@ -32713,7 +32713,7 @@
                 <a:ea typeface="Malgun Gothic"/>
                 <a:cs typeface="Malgun Gothic"/>
               </a:rPr>
-              <a:t>행동열을 직접 추론</a:t>
+              <a:t>행동 시퀀스를 직접 추론</a:t>
             </a:r>
           </a:p>
         </p:txBody>
@@ -32768,7 +32768,7 @@
         <p:spPr>
           <a:xfrm>
             <a:off x="6388100" y="2968129"/>
-            <a:ext cx="5094288" cy="327000"/>
+            <a:ext cx="5094288" cy="603200"/>
           </a:xfrm>
           <a:prstGeom prst="rect">
             <a:avLst/>
@@ -32795,7 +32795,7 @@
                 <a:ea typeface="Malgun Gothic"/>
                 <a:cs typeface="Malgun Gothic"/>
               </a:rPr>
-              <a:t>모델로 행동열 </a:t>
+              <a:t>모델로 행동 시퀀스 </a:t>
             </a:r>
             <a:r>
               <a:rPr sz="1150" b="0" i="1">
@@ -32817,7 +32817,7 @@
                 <a:ea typeface="Malgun Gothic"/>
                 <a:cs typeface="Malgun Gothic"/>
               </a:rPr>
-              <a:t>를 굴려 </a:t>
+              <a:t>를 rollout해 </a:t>
             </a:r>
             <a:r>
               <a:rPr sz="1150" b="0" i="1">
@@ -32852,7 +32852,7 @@
         </p:nvSpPr>
         <p:spPr>
           <a:xfrm>
-            <a:off x="6388100" y="3265289"/>
+            <a:off x="6388100" y="3486249"/>
             <a:ext cx="5094288" cy="327000"/>
           </a:xfrm>
           <a:prstGeom prst="rect">
@@ -33406,7 +33406,7 @@
                 <a:ea typeface="Malgun Gothic"/>
                 <a:cs typeface="Malgun Gothic"/>
               </a:rPr>
-              <a:t>봉우리 둘인 참 분포 p를 가우시안 q 하나로 근사할 때 (a) 전방 KL은 두 모드를 다 덮는 넓은 q (b) 역방향 KL은 한 모드를 고르는 좁은 q</a:t>
+              <a:t>봉우리 둘인 참 분포 p를 가우시안 q 하나로 근사할 때 (a) forward KL은 두 모드를 다 덮는 넓은 q (b) reverse KL은 한 모드를 고르는 좁은 q</a:t>
             </a:r>
           </a:p>
         </p:txBody>
@@ -33569,7 +33569,7 @@
         <p:spPr>
           <a:xfrm>
             <a:off x="927100" y="5041007"/>
-            <a:ext cx="899616" cy="241300"/>
+            <a:ext cx="1137841" cy="241300"/>
           </a:xfrm>
           <a:prstGeom prst="roundRect">
             <a:avLst>
@@ -33600,7 +33600,7 @@
         <p:spPr>
           <a:xfrm>
             <a:off x="1016000" y="5066407"/>
-            <a:ext cx="768871" cy="288925"/>
+            <a:ext cx="1014242" cy="288925"/>
           </a:xfrm>
           <a:prstGeom prst="rect">
             <a:avLst/>
@@ -33627,7 +33627,7 @@
                 <a:ea typeface="Malgun Gothic"/>
                 <a:cs typeface="Malgun Gothic"/>
               </a:rPr>
-              <a:t>전방 KL(p‖q)</a:t>
+              <a:t>forward KL(p‖q)</a:t>
             </a:r>
           </a:p>
         </p:txBody>
@@ -33831,7 +33831,7 @@
         <p:spPr>
           <a:xfrm>
             <a:off x="6388100" y="5041007"/>
-            <a:ext cx="1012825" cy="241300"/>
+            <a:ext cx="1112540" cy="241300"/>
           </a:xfrm>
           <a:prstGeom prst="roundRect">
             <a:avLst>
@@ -33862,7 +33862,7 @@
         <p:spPr>
           <a:xfrm>
             <a:off x="6477000" y="5066407"/>
-            <a:ext cx="885476" cy="288925"/>
+            <a:ext cx="988182" cy="288925"/>
           </a:xfrm>
           <a:prstGeom prst="rect">
             <a:avLst/>
@@ -33889,7 +33889,7 @@
                 <a:ea typeface="Malgun Gothic"/>
                 <a:cs typeface="Malgun Gothic"/>
               </a:rPr>
-              <a:t>역방향 KL(q‖p)</a:t>
+              <a:t>reverse KL(q‖p)</a:t>
             </a:r>
           </a:p>
         </p:txBody>
@@ -34038,7 +34038,7 @@
                 <a:ea typeface="Malgun Gothic"/>
                 <a:cs typeface="Malgun Gothic"/>
               </a:rPr>
-              <a:t>온도는 표본 몇 개 분량의 정보를 믿을지 정한다</a:t>
+              <a:t>온도는 샘플 몇 개 분량의 정보를 믿을지 정한다</a:t>
             </a:r>
           </a:p>
         </p:txBody>
@@ -34222,7 +34222,7 @@
                 <a:ea typeface="Malgun Gothic"/>
                 <a:cs typeface="Malgun Gothic"/>
               </a:rPr>
-              <a:t>넓고 얕은 골짜기, 좁고 깊은 골짜기, 가운데 언덕이 있는 비용. 같은 표본 64개를 세 온도로 가중했다(빨간 선이 가중 평균)</a:t>
+              <a:t>넓고 얕은 골짜기, 좁고 깊은 골짜기, 가운데 언덕이 있는 비용. 같은 샘플 64개를 세 온도로 가중했다(빨간 선이 가중 평균)</a:t>
             </a:r>
           </a:p>
         </p:txBody>
@@ -34484,7 +34484,7 @@
                 <a:ea typeface="Malgun Gothic"/>
                 <a:cs typeface="Malgun Gothic"/>
               </a:rPr>
-              <a:t>유효 표본 1.6개. 가장 좋은 표본 하나에 몰린다. 잡음에 휘둘린다.</a:t>
+              <a:t>유효 샘플 1.6개. 가장 좋은 샘플 하나에 몰린다. 잡음에 휘둘린다.</a:t>
             </a:r>
           </a:p>
         </p:txBody>
@@ -34746,7 +34746,7 @@
                 <a:ea typeface="Malgun Gothic"/>
                 <a:cs typeface="Malgun Gothic"/>
               </a:rPr>
-              <a:t>유효 표본 59.4개. 평균에 가까워져 두 골짜기 사이 언덕으로 갈 수 있다.</a:t>
+              <a:t>유효 샘플 59.4개. 평균에 가까워져 두 골짜기 사이 언덕으로 갈 수 있다.</a:t>
             </a:r>
           </a:p>
         </p:txBody>
@@ -34827,7 +34827,7 @@
         <p:spPr>
           <a:xfrm>
             <a:off x="711200" y="781050"/>
-            <a:ext cx="11118088" cy="554335"/>
+            <a:ext cx="11118088" cy="1057870"/>
           </a:xfrm>
           <a:prstGeom prst="rect">
             <a:avLst/>
@@ -34854,7 +34854,7 @@
                 <a:ea typeface="Malgun Gothic"/>
                 <a:cs typeface="Malgun Gothic"/>
               </a:rPr>
-              <a:t>모델이 선형이고 비용이 이차면 LQR이 최적 제어를 닫힌 꼴로 준다</a:t>
+              <a:t>모델이 선형이고 비용이 이차면 LQR이 최적 제어를 closed-form으로 준다</a:t>
             </a:r>
           </a:p>
         </p:txBody>
@@ -34867,7 +34867,7 @@
         </p:nvSpPr>
         <p:spPr>
           <a:xfrm>
-            <a:off x="711200" y="1361678"/>
+            <a:off x="711200" y="1764506"/>
             <a:ext cx="10769600" cy="637778"/>
           </a:xfrm>
           <a:prstGeom prst="roundRect">
@@ -34898,7 +34898,7 @@
         </p:nvSpPr>
         <p:spPr>
           <a:xfrm>
-            <a:off x="711200" y="1361678"/>
+            <a:off x="711200" y="1764506"/>
             <a:ext cx="38100" cy="637778"/>
           </a:xfrm>
           <a:prstGeom prst="roundRect">
@@ -34937,7 +34937,7 @@
         </p:blipFill>
         <p:spPr>
           <a:xfrm>
-            <a:off x="901700" y="1450578"/>
+            <a:off x="901700" y="1853406"/>
             <a:ext cx="10433050" cy="466328"/>
           </a:xfrm>
           <a:prstGeom prst="rect">
@@ -34953,7 +34953,7 @@
         </p:nvSpPr>
         <p:spPr>
           <a:xfrm>
-            <a:off x="711200" y="2177256"/>
+            <a:off x="711200" y="2580084"/>
             <a:ext cx="10769600" cy="2095500"/>
           </a:xfrm>
           <a:prstGeom prst="roundRect">
@@ -34994,7 +34994,7 @@
         </p:blipFill>
         <p:spPr>
           <a:xfrm>
-            <a:off x="2626629" y="2177256"/>
+            <a:off x="2626629" y="2580084"/>
             <a:ext cx="6938742" cy="2095500"/>
           </a:xfrm>
           <a:prstGeom prst="rect">
@@ -35010,7 +35010,7 @@
         </p:nvSpPr>
         <p:spPr>
           <a:xfrm>
-            <a:off x="711200" y="4336256"/>
+            <a:off x="711200" y="4739084"/>
             <a:ext cx="11118088" cy="273050"/>
           </a:xfrm>
           <a:prstGeom prst="rect">
@@ -35051,7 +35051,7 @@
         </p:nvSpPr>
         <p:spPr>
           <a:xfrm>
-            <a:off x="711200" y="4691856"/>
+            <a:off x="711200" y="5094684"/>
             <a:ext cx="5308600" cy="1051520"/>
           </a:xfrm>
           <a:prstGeom prst="roundRect">
@@ -35082,7 +35082,7 @@
         </p:nvSpPr>
         <p:spPr>
           <a:xfrm>
-            <a:off x="711200" y="4691856"/>
+            <a:off x="711200" y="5094684"/>
             <a:ext cx="5308600" cy="6350"/>
           </a:xfrm>
           <a:prstGeom prst="rect">
@@ -35111,7 +35111,7 @@
         </p:nvSpPr>
         <p:spPr>
           <a:xfrm>
-            <a:off x="6013450" y="4691856"/>
+            <a:off x="6013450" y="5094684"/>
             <a:ext cx="6350" cy="1051520"/>
           </a:xfrm>
           <a:prstGeom prst="rect">
@@ -35140,7 +35140,7 @@
         </p:nvSpPr>
         <p:spPr>
           <a:xfrm>
-            <a:off x="711200" y="5737027"/>
+            <a:off x="711200" y="6139855"/>
             <a:ext cx="5308600" cy="6350"/>
           </a:xfrm>
           <a:prstGeom prst="rect">
@@ -35169,7 +35169,7 @@
         </p:nvSpPr>
         <p:spPr>
           <a:xfrm>
-            <a:off x="711200" y="4691856"/>
+            <a:off x="711200" y="5094684"/>
             <a:ext cx="50800" cy="1051520"/>
           </a:xfrm>
           <a:prstGeom prst="roundRect">
@@ -35200,7 +35200,7 @@
         </p:nvSpPr>
         <p:spPr>
           <a:xfrm>
-            <a:off x="927100" y="4837906"/>
+            <a:off x="927100" y="5240734"/>
             <a:ext cx="404416" cy="241300"/>
           </a:xfrm>
           <a:prstGeom prst="roundRect">
@@ -35231,7 +35231,7 @@
         </p:nvSpPr>
         <p:spPr>
           <a:xfrm>
-            <a:off x="1016000" y="4863306"/>
+            <a:off x="1016000" y="5266134"/>
             <a:ext cx="258814" cy="288925"/>
           </a:xfrm>
           <a:prstGeom prst="rect">
@@ -35272,7 +35272,7 @@
         </p:nvSpPr>
         <p:spPr>
           <a:xfrm>
-            <a:off x="927100" y="5155406"/>
+            <a:off x="927100" y="5558234"/>
             <a:ext cx="5094288" cy="603200"/>
           </a:xfrm>
           <a:prstGeom prst="rect">
@@ -35300,7 +35300,7 @@
                 <a:ea typeface="Malgun Gothic"/>
                 <a:cs typeface="Malgun Gothic"/>
               </a:rPr>
-              <a:t>Riccati 식으로 정확한 최적해를 빠르게 얻는다. 표본이 필요 없다. 비선형 문제도 국소 선형화(iLQR)나 MPC로 넓힌다.</a:t>
+              <a:t>Riccati 식으로 정확한 최적해를 빠르게 얻는다. 샘플이 필요 없다. 비선형 문제도 국소 선형화(iLQR)나 MPC로 넓힌다.</a:t>
             </a:r>
           </a:p>
         </p:txBody>
@@ -35313,7 +35313,7 @@
         </p:nvSpPr>
         <p:spPr>
           <a:xfrm>
-            <a:off x="6172200" y="4691856"/>
+            <a:off x="6172200" y="5094684"/>
             <a:ext cx="5308600" cy="1051520"/>
           </a:xfrm>
           <a:prstGeom prst="roundRect">
@@ -35344,7 +35344,7 @@
         </p:nvSpPr>
         <p:spPr>
           <a:xfrm>
-            <a:off x="6172200" y="4691856"/>
+            <a:off x="6172200" y="5094684"/>
             <a:ext cx="5308600" cy="6350"/>
           </a:xfrm>
           <a:prstGeom prst="rect">
@@ -35373,7 +35373,7 @@
         </p:nvSpPr>
         <p:spPr>
           <a:xfrm>
-            <a:off x="11474450" y="4691856"/>
+            <a:off x="11474450" y="5094684"/>
             <a:ext cx="6350" cy="1051520"/>
           </a:xfrm>
           <a:prstGeom prst="rect">
@@ -35402,7 +35402,7 @@
         </p:nvSpPr>
         <p:spPr>
           <a:xfrm>
-            <a:off x="6172200" y="5737027"/>
+            <a:off x="6172200" y="6139855"/>
             <a:ext cx="5308600" cy="6350"/>
           </a:xfrm>
           <a:prstGeom prst="rect">
@@ -35431,7 +35431,7 @@
         </p:nvSpPr>
         <p:spPr>
           <a:xfrm>
-            <a:off x="6172200" y="4691856"/>
+            <a:off x="6172200" y="5094684"/>
             <a:ext cx="50800" cy="1051520"/>
           </a:xfrm>
           <a:prstGeom prst="roundRect">
@@ -35462,7 +35462,7 @@
         </p:nvSpPr>
         <p:spPr>
           <a:xfrm>
-            <a:off x="6388100" y="4837906"/>
+            <a:off x="6388100" y="5240734"/>
             <a:ext cx="404416" cy="241300"/>
           </a:xfrm>
           <a:prstGeom prst="roundRect">
@@ -35493,7 +35493,7 @@
         </p:nvSpPr>
         <p:spPr>
           <a:xfrm>
-            <a:off x="6477000" y="4863306"/>
+            <a:off x="6477000" y="5266134"/>
             <a:ext cx="258814" cy="288925"/>
           </a:xfrm>
           <a:prstGeom prst="rect">
@@ -35534,7 +35534,7 @@
         </p:nvSpPr>
         <p:spPr>
           <a:xfrm>
-            <a:off x="6388100" y="5155406"/>
+            <a:off x="6388100" y="5558234"/>
             <a:ext cx="5094288" cy="603200"/>
           </a:xfrm>
           <a:prstGeom prst="rect">
@@ -35670,7 +35670,7 @@
                 <a:ea typeface="Malgun Gothic"/>
                 <a:cs typeface="Malgun Gothic"/>
               </a:rPr>
-              <a:t>계획기는 배운 모델이 틀린 곳을 찾아가 이용한다</a:t>
+              <a:t>플래너는 배운 모델이 틀린 곳을 찾아가 이용한다</a:t>
             </a:r>
           </a:p>
         </p:txBody>
@@ -35768,7 +35768,7 @@
                 <a:ea typeface="Malgun Gothic"/>
                 <a:cs typeface="Malgun Gothic"/>
               </a:rPr>
-              <a:t>(a) 자료 밖에서 모델 앙상블이 갈라진다 (b) 모델 하나는 자료 밖 a=−2.50을 골라 실제로 −2.06이 되고, 앙상블 평균−2σ는 참 최적과 같은 값을 낸다 (c) 한 스텝 오차가 작아도 길게 굴리면 쌓인다</a:t>
+              <a:t>(a) 데이터 밖에서 모델 앙상블이 갈라진다 (b) 모델 하나는 데이터 밖 a=−2.50을 골라 실제로 −2.06이 되고, 앙상블 평균−2σ는 참 최적과 같은 값을 낸다 (c) 한 스텝 오차가 작아도 길게 rollout하면 쌓인다</a:t>
             </a:r>
           </a:p>
         </p:txBody>
@@ -36333,7 +36333,7 @@
                 <a:ea typeface="Malgun Gothic"/>
                 <a:cs typeface="Malgun Gothic"/>
               </a:rPr>
-              <a:t>실제 상태에서 몇 스텝만 굴린다</a:t>
+              <a:t>실제 상태에서 몇 스텝만 rollout한다</a:t>
             </a:r>
           </a:p>
         </p:txBody>
@@ -36537,7 +36537,7 @@
         <p:spPr>
           <a:xfrm>
             <a:off x="8208367" y="4212828"/>
-            <a:ext cx="660995" cy="241300"/>
+            <a:ext cx="782241" cy="241300"/>
           </a:xfrm>
           <a:prstGeom prst="roundRect">
             <a:avLst>
@@ -36568,7 +36568,7 @@
         <p:spPr>
           <a:xfrm>
             <a:off x="8297267" y="4238228"/>
-            <a:ext cx="523091" cy="288925"/>
+            <a:ext cx="647974" cy="288925"/>
           </a:xfrm>
           <a:prstGeom prst="rect">
             <a:avLst/>
@@ -36595,7 +36595,7 @@
                 <a:ea typeface="Malgun Gothic"/>
                 <a:cs typeface="Malgun Gothic"/>
               </a:rPr>
-              <a:t>잠재 공간</a:t>
+              <a:t>latent 공간</a:t>
             </a:r>
           </a:p>
         </p:txBody>
@@ -36636,7 +36636,7 @@
                 <a:ea typeface="Malgun Gothic"/>
                 <a:cs typeface="Malgun Gothic"/>
               </a:rPr>
-              <a:t>작은 잠재 상태에서 굴린다</a:t>
+              <a:t>작은 latent 상태에서 rollout한다</a:t>
             </a:r>
           </a:p>
         </p:txBody>
@@ -36882,7 +36882,7 @@
                 <a:ea typeface="Malgun Gothic"/>
                 <a:cs typeface="Malgun Gothic"/>
               </a:rPr>
-              <a:t>모델 기반은 표본을 아끼는 대신 모델 오차를 떠안는다</a:t>
+              <a:t>모델 기반은 샘플을 아끼는 대신 모델 오차를 떠안는다</a:t>
             </a:r>
           </a:p>
         </p:txBody>
@@ -36987,7 +36987,7 @@
                           <a:ea typeface="Malgun Gothic"/>
                           <a:cs typeface="Malgun Gothic"/>
                         </a:rPr>
-                        <a:t>표본 효율</a:t>
+                        <a:t>샘플 효율</a:t>
                       </a:r>
                     </a:p>
                   </a:txBody>
@@ -37035,7 +37035,7 @@
                           <a:ea typeface="Malgun Gothic"/>
                           <a:cs typeface="Malgun Gothic"/>
                         </a:rPr>
-                        <a:t>높다. 상상으로 표본을 늘린다</a:t>
+                        <a:t>높다. 모델 rollout으로 샘플을 늘린다</a:t>
                       </a:r>
                     </a:p>
                   </a:txBody>
@@ -37424,7 +37424,7 @@
                 <a:ea typeface="Malgun Gothic"/>
                 <a:cs typeface="Malgun Gothic"/>
               </a:rPr>
-              <a:t> 둘을 섞는다. 모델로 계획하고 끝 가치는 학습한 critic으로 채우거나(TD-MPC), 정책을 MPC의 초기 추측으로 쓴다.</a:t>
+              <a:t> 둘을 섞는다. 모델로 계획하고 horizon 끝의 가치는 학습한 critic으로 채우거나(TD-MPC), 정책 출력을 MPC의 초기 해(warm start)로 쓴다.</a:t>
             </a:r>
           </a:p>
         </p:txBody>
@@ -37961,7 +37961,7 @@
                 <a:ea typeface="Malgun Gothic"/>
                 <a:cs typeface="Malgun Gothic"/>
               </a:rPr>
-              <a:t>기댓값은 표본 평균으로 근사한다</a:t>
+              <a:t>기댓값은 샘플 평균으로 근사한다</a:t>
             </a:r>
           </a:p>
         </p:txBody>
@@ -38013,7 +38013,7 @@
                 <a:ea typeface="Malgun Gothic"/>
                 <a:cs typeface="Malgun Gothic"/>
               </a:rPr>
-              <a:t>. 강화학습의 거의 모든 식이 "궤적을 뽑아 평균 낸다"로 계산된다.</a:t>
+              <a:t>. 강화학습의 거의 모든 식이 "궤적을 샘플링해 평균 낸다"로 계산된다.</a:t>
             </a:r>
           </a:p>
         </p:txBody>
@@ -38589,7 +38589,7 @@
                 <a:ea typeface="Malgun Gothic"/>
                 <a:cs typeface="Malgun Gothic"/>
               </a:rPr>
-              <a:t>신경망은 크기가 큰 표 대신 쓰는 함수다</a:t>
+              <a:t>신경망은 큰 표(table) 대신 쓰는 함수다</a:t>
             </a:r>
           </a:p>
         </p:txBody>
@@ -39259,7 +39259,7 @@
         <p:spPr>
           <a:xfrm>
             <a:off x="927100" y="1507728"/>
-            <a:ext cx="660995" cy="241300"/>
+            <a:ext cx="1141313" cy="241300"/>
           </a:xfrm>
           <a:prstGeom prst="roundRect">
             <a:avLst>
@@ -39290,7 +39290,7 @@
         <p:spPr>
           <a:xfrm>
             <a:off x="1016000" y="1533128"/>
-            <a:ext cx="523091" cy="288925"/>
+            <a:ext cx="1017819" cy="288925"/>
           </a:xfrm>
           <a:prstGeom prst="rect">
             <a:avLst/>
@@ -39317,7 +39317,7 @@
                 <a:ea typeface="Malgun Gothic"/>
                 <a:cs typeface="Malgun Gothic"/>
               </a:rPr>
-              <a:t>드문 보상</a:t>
+              <a:t>희소 보상(sparse)</a:t>
             </a:r>
           </a:p>
         </p:txBody>
@@ -39625,7 +39625,7 @@
         <p:spPr>
           <a:xfrm>
             <a:off x="6388100" y="1507728"/>
-            <a:ext cx="774204" cy="241300"/>
+            <a:ext cx="1215827" cy="241300"/>
           </a:xfrm>
           <a:prstGeom prst="roundRect">
             <a:avLst>
@@ -39656,7 +39656,7 @@
         <p:spPr>
           <a:xfrm>
             <a:off x="6477000" y="1533128"/>
-            <a:ext cx="639696" cy="288925"/>
+            <a:ext cx="1094567" cy="288925"/>
           </a:xfrm>
           <a:prstGeom prst="rect">
             <a:avLst/>
@@ -39683,7 +39683,7 @@
                 <a:ea typeface="Malgun Gothic"/>
                 <a:cs typeface="Malgun Gothic"/>
               </a:rPr>
-              <a:t>촘촘한 보상</a:t>
+              <a:t>조밀한 보상(dense)</a:t>
             </a:r>
           </a:p>
         </p:txBody>
@@ -39986,7 +39986,7 @@
                 <a:ea typeface="Malgun Gothic"/>
                 <a:cs typeface="Malgun Gothic"/>
               </a:rPr>
-              <a:t>안전한 길잡이:</a:t>
+              <a:t>안전한 방법:</a:t>
             </a:r>
             <a:r>
               <a:rPr sz="1300" b="0" i="0">
@@ -39997,7 +39997,7 @@
                 <a:ea typeface="Malgun Gothic"/>
                 <a:cs typeface="Malgun Gothic"/>
               </a:rPr>
-              <a:t> 위처럼 잠재 함수 Φ의 차이로 더한 보상(potential-based shaping)은 최적 정책을 바꾸지 않는다.</a:t>
+              <a:t> 위처럼 퍼텐셜 함수 Φ의 차이로 더한 보상(potential-based shaping)은 최적 정책을 바꾸지 않는다.</a:t>
             </a:r>
           </a:p>
         </p:txBody>
@@ -40300,7 +40300,7 @@
                 <a:ea typeface="Malgun Gothic"/>
                 <a:cs typeface="Malgun Gothic"/>
               </a:rPr>
-              <a:t>(a) 원래 목표 g에는 실패했지만, 실제로 지난 점 g′을 목표로 다시 붙이면 성공 사례가 된다 (b) 12칸 사슬, 목표 조건 Q-learning, seed 30개: 다시 붙이기가 학습을 앞당긴다</a:t>
+              <a:t>(a) 원래 목표 g에는 실패했지만, 실제로 지난 점 g′을 목표로 다시 붙이면 성공 사례가 된다 (b) 12칸 사슬, goal-conditioned Q-learning, seed 30개: relabeling이 학습을 앞당긴다</a:t>
             </a:r>
           </a:p>
         </p:txBody>
@@ -40562,7 +40562,7 @@
                 <a:ea typeface="Malgun Gothic"/>
                 <a:cs typeface="Malgun Gothic"/>
               </a:rPr>
-              <a:t>드문 보상 문제에서 보상 조형 없이 신호를 만든다. off-policy 방법 어디에나 붙는다.</a:t>
+              <a:t>희소 보상 문제에서 reward shaping 없이 신호를 만든다. off-policy 방법 어디에나 붙는다.</a:t>
             </a:r>
           </a:p>
         </p:txBody>
@@ -40824,7 +40824,7 @@
                 <a:ea typeface="Malgun Gothic"/>
                 <a:cs typeface="Malgun Gothic"/>
               </a:rPr>
-              <a:t>목표를 입력으로 받는 정책(목표 조건 RL)이어야 한다. "목표"를 상태로 적을 수 있는 과제에만 맞는다.</a:t>
+              <a:t>목표를 입력으로 받는 정책(goal-conditioned RL)이어야 한다. "목표"를 상태로 적을 수 있는 과제에만 맞는다.</a:t>
             </a:r>
           </a:p>
         </p:txBody>
@@ -41651,7 +41651,7 @@
                 <a:ea typeface="Malgun Gothic"/>
                 <a:cs typeface="Malgun Gothic"/>
               </a:rPr>
-              <a:t>같은 시연을 설명하는 보상이 여럿이다(모호성). 안쪽 고리에서 RL을 반복해 비싸다.</a:t>
+              <a:t>같은 시연을 설명하는 보상이 여럿이다(모호성). inner loop에서 RL을 반복해 비싸다.</a:t>
             </a:r>
           </a:p>
         </p:txBody>
@@ -42029,7 +42029,7 @@
                 <a:ea typeface="Malgun Gothic"/>
                 <a:cs typeface="Malgun Gothic"/>
               </a:rPr>
-              <a:t>(a) Bradley–Terry: 보상 차가 선호 확률이 된다 (b) GRPO: 응답 8개 중 3개가 정답이면 통과 +1.29, 실패 −0.77의 이점 (c) β가 작을수록 최적 정책이 보상 쪽으로 쏠린다</a:t>
+              <a:t>(a) Bradley–Terry: 보상 차가 선호 확률이 된다 (b) GRPO: 응답 8개 중 3개가 정답이면 통과 +1.29, 실패 −0.77의 advantage (c) β가 작을수록 최적 정책이 보상 쪽으로 쏠린다</a:t>
             </a:r>
           </a:p>
         </p:txBody>
@@ -42597,7 +42597,7 @@
                 <a:ea typeface="Malgun Gothic"/>
                 <a:cs typeface="Malgun Gothic"/>
               </a:rPr>
-              <a:t> 자료 밖 탐색이 없다.</a:t>
+              <a:t> 데이터 밖 탐색이 없다.</a:t>
             </a:r>
           </a:p>
         </p:txBody>
@@ -42881,7 +42881,7 @@
                 <a:ea typeface="Malgun Gothic"/>
                 <a:cs typeface="Malgun Gothic"/>
               </a:rPr>
-              <a:t> 질문마다 여러 응답을 뽑는다.</a:t>
+              <a:t> 질문마다 여러 응답을 샘플링한다.</a:t>
             </a:r>
           </a:p>
         </p:txBody>
@@ -43059,7 +43059,7 @@
         <p:spPr>
           <a:xfrm>
             <a:off x="711200" y="781050"/>
-            <a:ext cx="11118088" cy="554335"/>
+            <a:ext cx="11118088" cy="1057870"/>
           </a:xfrm>
           <a:prstGeom prst="rect">
             <a:avLst/>
@@ -43086,7 +43086,7 @@
                 <a:ea typeface="Malgun Gothic"/>
                 <a:cs typeface="Malgun Gothic"/>
               </a:rPr>
-              <a:t>diffusion·flow 정책은 여러 해를 담지만 로그 확률을 구하기 어렵다</a:t>
+              <a:t>diffusion·flow 정책은 여러 해를 담지만 log-probability를 구하기 어렵다</a:t>
             </a:r>
           </a:p>
         </p:txBody>
@@ -43099,7 +43099,7 @@
         </p:nvSpPr>
         <p:spPr>
           <a:xfrm>
-            <a:off x="711200" y="1361678"/>
+            <a:off x="711200" y="1764506"/>
             <a:ext cx="10769600" cy="2095500"/>
           </a:xfrm>
           <a:prstGeom prst="roundRect">
@@ -43140,7 +43140,7 @@
         </p:blipFill>
         <p:spPr>
           <a:xfrm>
-            <a:off x="2568222" y="1361678"/>
+            <a:off x="2568222" y="1764506"/>
             <a:ext cx="7055556" cy="2095500"/>
           </a:xfrm>
           <a:prstGeom prst="rect">
@@ -43156,7 +43156,7 @@
         </p:nvSpPr>
         <p:spPr>
           <a:xfrm>
-            <a:off x="711200" y="3520678"/>
+            <a:off x="711200" y="3923506"/>
             <a:ext cx="11118088" cy="273050"/>
           </a:xfrm>
           <a:prstGeom prst="rect">
@@ -43184,7 +43184,7 @@
                 <a:ea typeface="Malgun Gothic"/>
                 <a:cs typeface="Malgun Gothic"/>
               </a:rPr>
-              <a:t>(a) 잡음에서 시작한 표본이 두 모드로 갈린다 (b) 가우시안 정책은 두 모드의 평균, 곧 장애물 쪽이 가장 짙다 (c) 오른쪽 회피의 보상이 크면 강화학습이 그 모드를 키운다</a:t>
+              <a:t>(a) 잡음에서 시작한 샘플이 두 모드로 갈린다 (b) 가우시안 정책은 두 모드의 평균, 곧 장애물 쪽이 가장 짙다 (c) 오른쪽 회피의 보상이 크면 강화학습이 그 모드를 키운다</a:t>
             </a:r>
           </a:p>
         </p:txBody>
@@ -43198,7 +43198,7 @@
           <p:nvPr/>
         </p:nvGraphicFramePr>
         <p:xfrm>
-          <a:off x="711200" y="3876278"/>
+          <a:off x="711200" y="4279106"/>
           <a:ext cx="10769600" cy="1626165"/>
         </p:xfrm>
         <a:graphic>
@@ -43227,7 +43227,7 @@
                           <a:ea typeface="Malgun Gothic"/>
                           <a:cs typeface="Malgun Gothic"/>
                         </a:rPr>
-                        <a:t>우회하는 길</a:t>
+                        <a:t>우회 방법</a:t>
                       </a:r>
                     </a:p>
                   </a:txBody>
@@ -43275,7 +43275,7 @@
                           <a:ea typeface="Malgun Gothic"/>
                           <a:cs typeface="Malgun Gothic"/>
                         </a:rPr>
-                        <a:t>생각</a:t>
+                        <a:t>아이디어</a:t>
                       </a:r>
                     </a:p>
                   </a:txBody>
@@ -43349,7 +43349,7 @@
                           <a:ea typeface="Malgun Gothic"/>
                           <a:cs typeface="Malgun Gothic"/>
                         </a:rPr>
-                        <a:t>잡음 제거 스텝마다 가우시안 행동으로 보고 PPO</a:t>
+                        <a:t>denoising 스텝마다 가우시안 행동으로 보고 PPO</a:t>
                       </a:r>
                     </a:p>
                   </a:txBody>
@@ -43571,7 +43571,7 @@
                           <a:ea typeface="Malgun Gothic"/>
                           <a:cs typeface="Malgun Gothic"/>
                         </a:rPr>
-                        <a:t>정책의 점수를 Q의 행동 기울기에 맞춘다</a:t>
+                        <a:t>정책의 score를 Q의 행동 gradient에 맞춘다</a:t>
                       </a:r>
                     </a:p>
                   </a:txBody>
@@ -44306,7 +44306,7 @@
                 <a:ea typeface="Malgun Gothic"/>
                 <a:cs typeface="Malgun Gothic"/>
               </a:rPr>
-              <a:t>제약을 벌점 계수로 바꿔 함께 배운다. </a:t>
+              <a:t>제약을 페널티 계수로 바꿔 함께 배운다. </a:t>
             </a:r>
             <a:r>
               <a:rPr sz="1150" b="1" i="0">
@@ -44612,7 +44612,7 @@
                 <a:ea typeface="Malgun Gothic"/>
                 <a:cs typeface="Malgun Gothic"/>
               </a:rPr>
-              <a:t> 꼬리 표본이 적어 추정이 흔들린다.</a:t>
+              <a:t> 꼬리 샘플이 적어 추정이 흔들린다.</a:t>
             </a:r>
           </a:p>
         </p:txBody>
@@ -44874,7 +44874,7 @@
                 <a:ea typeface="Malgun Gothic"/>
                 <a:cs typeface="Malgun Gothic"/>
               </a:rPr>
-              <a:t>정책 출력을 실행 전에 검사·수정한다(CBF, 도달 가능성). </a:t>
+              <a:t>정책 출력을 실행 전에 검사·수정한다(CBF, reachability). </a:t>
             </a:r>
             <a:r>
               <a:rPr sz="1150" b="1" i="0">
@@ -45004,7 +45004,7 @@
                 <a:ea typeface="Malgun Gothic"/>
                 <a:cs typeface="Malgun Gothic"/>
               </a:rPr>
-              <a:t>모든 방법은 표본, 안정성, 가정 사이의</a:t>
+              <a:t>모든 방법은 샘플, 안정성, 가정 사이의</a:t>
             </a:r>
           </a:p>
           <a:p>
@@ -45022,7 +45022,7 @@
                 <a:ea typeface="Malgun Gothic"/>
                 <a:cs typeface="Malgun Gothic"/>
               </a:rPr>
-              <a:t>맞바꿈이다</a:t>
+              <a:t>트레이드오프다</a:t>
             </a:r>
           </a:p>
         </p:txBody>
@@ -45130,7 +45130,7 @@
                 <a:ea typeface="Malgun Gothic"/>
                 <a:cs typeface="Malgun Gothic"/>
               </a:rPr>
-              <a:t>6 · 표본 효율</a:t>
+              <a:t>6 · 샘플 효율</a:t>
             </a:r>
           </a:p>
         </p:txBody>
@@ -45171,7 +45171,7 @@
                 <a:ea typeface="Malgun Gothic"/>
                 <a:cs typeface="Malgun Gothic"/>
               </a:rPr>
-              <a:t>표본을 아낄수록 더 많은 가정과 계산을 떠안는다</a:t>
+              <a:t>샘플을 아낄수록 더 많은 가정과 계산을 떠안는다</a:t>
             </a:r>
           </a:p>
         </p:txBody>
@@ -45269,7 +45269,7 @@
                 <a:ea typeface="Malgun Gothic"/>
                 <a:cs typeface="Malgun Gothic"/>
               </a:rPr>
-              <a:t>방법 갈래의 대략적인 표본 효율 순서. 오른쪽으로 갈수록 표본은 적게 들지만 재생 버퍼, critic, 모델, 고정된 자료에 대한 가정이 는다</a:t>
+              <a:t>방법 갈래의 대략적인 샘플 효율 순서. 오른쪽으로 갈수록 샘플은 적게 들지만 재생 버퍼, critic, 모델, 고정된 데이터에 대한 가정이 는다</a:t>
             </a:r>
           </a:p>
         </p:txBody>
@@ -45531,7 +45531,7 @@
                 <a:ea typeface="Malgun Gothic"/>
                 <a:cs typeface="Malgun Gothic"/>
               </a:rPr>
-              <a:t>왼쪽(PPO, ES)이 안정적이고 단순하다. 병렬 환경 수천 개로 표본 비용을 덮는다.</a:t>
+              <a:t>왼쪽(PPO, ES)이 안정적이고 단순하다. 병렬 환경 수천 개로 샘플 비용을 덮는다.</a:t>
             </a:r>
           </a:p>
         </p:txBody>
@@ -45752,7 +45752,7 @@
                 <a:ea typeface="Malgun Gothic"/>
                 <a:cs typeface="Malgun Gothic"/>
               </a:rPr>
-              <a:t>표본이 비싸다면</a:t>
+              <a:t>샘플이 비싸다면</a:t>
             </a:r>
           </a:p>
         </p:txBody>
@@ -45793,7 +45793,7 @@
                 <a:ea typeface="Malgun Gothic"/>
                 <a:cs typeface="Malgun Gothic"/>
               </a:rPr>
-              <a:t>오른쪽(SAC, 모델 기반, 오프라인)을 본다. 대신 critic·모델의 오차를 막는 장치를 함께 쓴다.</a:t>
+              <a:t>오른쪽(SAC, 모델 기반, 오프라인)을 살펴본다. 대신 critic·모델의 오차를 막는 장치를 함께 쓴다.</a:t>
             </a:r>
           </a:p>
         </p:txBody>
@@ -45916,7 +45916,7 @@
         </p:nvGraphicFramePr>
         <p:xfrm>
           <a:off x="711200" y="1361678"/>
-          <a:ext cx="10769601" cy="2049194"/>
+          <a:ext cx="10769599" cy="2049194"/>
         </p:xfrm>
         <a:graphic>
           <a:graphicData uri="http://schemas.openxmlformats.org/drawingml/2006/table">
@@ -45925,13 +45925,13 @@
                 <a:tableStyleId>{5C22544A-7EE6-4342-B048-85BDC9FD1C3A}</a:tableStyleId>
               </a:tblPr>
               <a:tblGrid>
-                <a:gridCol w="1491754"/>
-                <a:gridCol w="1380133"/>
-                <a:gridCol w="657523"/>
-                <a:gridCol w="657523"/>
-                <a:gridCol w="2145209"/>
-                <a:gridCol w="2324100"/>
-                <a:gridCol w="2113359"/>
+                <a:gridCol w="1437084"/>
+                <a:gridCol w="1329531"/>
+                <a:gridCol w="830858"/>
+                <a:gridCol w="633412"/>
+                <a:gridCol w="2066528"/>
+                <a:gridCol w="2436316"/>
+                <a:gridCol w="2035870"/>
               </a:tblGrid>
               <a:tr h="300067">
                 <a:tc>
@@ -45996,7 +45996,7 @@
                           <a:ea typeface="Malgun Gothic"/>
                           <a:cs typeface="Malgun Gothic"/>
                         </a:rPr>
-                        <a:t>자료</a:t>
+                        <a:t>데이터</a:t>
                       </a:r>
                     </a:p>
                   </a:txBody>
@@ -46408,7 +46408,7 @@
                           <a:ea typeface="Malgun Gothic"/>
                           <a:cs typeface="Malgun Gothic"/>
                         </a:rPr>
-                        <a:t>큰 망에 비효율</a:t>
+                        <a:t>큰 네트워크에 비효율</a:t>
                       </a:r>
                     </a:p>
                   </a:txBody>
@@ -46554,7 +46554,7 @@
                           <a:ea typeface="Malgun Gothic"/>
                           <a:cs typeface="Malgun Gothic"/>
                         </a:rPr>
-                        <a:t>튼튼한 표준</a:t>
+                        <a:t>robust한 표준</a:t>
                       </a:r>
                     </a:p>
                   </a:txBody>
@@ -46578,7 +46578,7 @@
                           <a:ea typeface="Malgun Gothic"/>
                           <a:cs typeface="Malgun Gothic"/>
                         </a:rPr>
-                        <a:t>표본 많이</a:t>
+                        <a:t>샘플 많이</a:t>
                       </a:r>
                     </a:p>
                   </a:txBody>
@@ -46724,7 +46724,7 @@
                           <a:ea typeface="Malgun Gothic"/>
                           <a:cs typeface="Malgun Gothic"/>
                         </a:rPr>
-                        <a:t>자료 재사용</a:t>
+                        <a:t>데이터 재사용</a:t>
                       </a:r>
                     </a:p>
                   </a:txBody>
@@ -46918,7 +46918,7 @@
                           <a:ea typeface="Malgun Gothic"/>
                           <a:cs typeface="Malgun Gothic"/>
                         </a:rPr>
-                        <a:t>결정적 정책, 탐색 약함</a:t>
+                        <a:t>결정론적 정책, 탐색 약함</a:t>
                       </a:r>
                     </a:p>
                   </a:txBody>
@@ -47230,7 +47230,7 @@
                 <a:ea typeface="Malgun Gothic"/>
                 <a:cs typeface="Malgun Gothic"/>
               </a:rPr>
-              <a:t>모델 기반·자료 기반 방법: 무엇을 가정하고 언제 쓰나</a:t>
+              <a:t>모델 기반·데이터 기반 방법: 무엇을 가정하고 언제 쓰나</a:t>
             </a:r>
           </a:p>
         </p:txBody>
@@ -47254,11 +47254,11 @@
                 <a:tableStyleId>{5C22544A-7EE6-4342-B048-85BDC9FD1C3A}</a:tableStyleId>
               </a:tblPr>
               <a:tblGrid>
-                <a:gridCol w="1676400"/>
-                <a:gridCol w="1671935"/>
-                <a:gridCol w="2514997"/>
-                <a:gridCol w="2268041"/>
-                <a:gridCol w="2638227"/>
+                <a:gridCol w="1648123"/>
+                <a:gridCol w="1643757"/>
+                <a:gridCol w="2472531"/>
+                <a:gridCol w="2411512"/>
+                <a:gridCol w="2593677"/>
               </a:tblGrid>
               <a:tr h="300067">
                 <a:tc>
@@ -47543,7 +47543,7 @@
                           <a:ea typeface="Malgun Gothic"/>
                           <a:cs typeface="Malgun Gothic"/>
                         </a:rPr>
-                        <a:t>모델(굴리기만)</a:t>
+                        <a:t>모델(rollout만)</a:t>
                       </a:r>
                     </a:p>
                   </a:txBody>
@@ -47591,7 +47591,7 @@
                           <a:ea typeface="Malgun Gothic"/>
                           <a:cs typeface="Malgun Gothic"/>
                         </a:rPr>
-                        <a:t>표본 수·온도에 민감</a:t>
+                        <a:t>샘플 수·온도에 민감</a:t>
                       </a:r>
                     </a:p>
                   </a:txBody>
@@ -47689,7 +47689,7 @@
                           <a:ea typeface="Malgun Gothic"/>
                           <a:cs typeface="Malgun Gothic"/>
                         </a:rPr>
-                        <a:t>표본 효율 최고 수준</a:t>
+                        <a:t>샘플 효율 최고 수준</a:t>
                       </a:r>
                     </a:p>
                   </a:txBody>
@@ -47737,7 +47737,7 @@
                           <a:ea typeface="Malgun Gothic"/>
                           <a:cs typeface="Malgun Gothic"/>
                         </a:rPr>
-                        <a:t>표본이 비쌀 때</a:t>
+                        <a:t>샘플이 비쌀 때</a:t>
                       </a:r>
                     </a:p>
                   </a:txBody>
@@ -47957,7 +47957,7 @@
                           <a:ea typeface="Malgun Gothic"/>
                           <a:cs typeface="Malgun Gothic"/>
                         </a:rPr>
-                        <a:t>자료 범위 밖으로 못 간다</a:t>
+                        <a:t>데이터 범위 밖으로 못 간다</a:t>
                       </a:r>
                     </a:p>
                   </a:txBody>
@@ -48610,7 +48610,7 @@
                 <a:ea typeface="Malgun Gothic"/>
                 <a:cs typeface="Malgun Gothic"/>
               </a:rPr>
-              <a:t>표본을 아무리 모아도 사라지지 않는다. 틀린 가치 추정을 빌려 쓰면 생긴다.</a:t>
+              <a:t>샘플을 아무리 모아도 사라지지 않는다. 틀린 가치 추정값을 대신 쓰면 생긴다.</a:t>
             </a:r>
           </a:p>
         </p:txBody>
@@ -48872,7 +48872,7 @@
                 <a:ea typeface="Malgun Gothic"/>
                 <a:cs typeface="Malgun Gothic"/>
               </a:rPr>
-              <a:t>표본마다 흔들리는 정도</a:t>
+              <a:t>샘플마다 흔들리는 정도</a:t>
             </a:r>
           </a:p>
         </p:txBody>
@@ -48913,7 +48913,7 @@
                 <a:ea typeface="Malgun Gothic"/>
                 <a:cs typeface="Malgun Gothic"/>
               </a:rPr>
-              <a:t>표본 N개 평균의 분산은 </a:t>
+              <a:t>샘플 N개 평균의 분산은 </a:t>
             </a:r>
             <a:r>
               <a:rPr sz="1150" b="0" i="1">
@@ -48935,7 +48935,7 @@
                 <a:ea typeface="Malgun Gothic"/>
                 <a:cs typeface="Malgun Gothic"/>
               </a:rPr>
-              <a:t>이다. 표본을 늘리면 줄지만 비용이 든다.</a:t>
+              <a:t>이다. 샘플을 늘리면 줄지만 비용이 든다.</a:t>
             </a:r>
           </a:p>
         </p:txBody>
@@ -49098,7 +49098,7 @@
         <p:spPr>
           <a:xfrm>
             <a:off x="8208367" y="2424509"/>
-            <a:ext cx="517723" cy="241300"/>
+            <a:ext cx="857548" cy="241300"/>
           </a:xfrm>
           <a:prstGeom prst="roundRect">
             <a:avLst>
@@ -49129,7 +49129,7 @@
         <p:spPr>
           <a:xfrm>
             <a:off x="8297267" y="2449909"/>
-            <a:ext cx="375521" cy="288925"/>
+            <a:ext cx="725540" cy="288925"/>
           </a:xfrm>
           <a:prstGeom prst="rect">
             <a:avLst/>
@@ -49156,7 +49156,7 @@
                 <a:ea typeface="Malgun Gothic"/>
                 <a:cs typeface="Malgun Gothic"/>
               </a:rPr>
-              <a:t>맞바꿈</a:t>
+              <a:t>트레이드오프</a:t>
             </a:r>
           </a:p>
         </p:txBody>
@@ -49238,7 +49238,7 @@
                 <a:ea typeface="Malgun Gothic"/>
                 <a:cs typeface="Malgun Gothic"/>
               </a:rPr>
-              <a:t>강화학습의 많은 요령(기준선, critic, GAE, 할인)이 이 맞바꿈이다.</a:t>
+              <a:t>강화학습의 많은 기법(기준선, critic, GAE, 할인)이 이 트레이드오프다.</a:t>
             </a:r>
           </a:p>
         </p:txBody>
@@ -51825,7 +51825,7 @@
                 <a:ea typeface="Malgun Gothic"/>
                 <a:cs typeface="Malgun Gothic"/>
               </a:rPr>
-              <a:t>강화학습은 보상의 합을 키우는 정책을 표본으로 찾는 일이다</a:t>
+              <a:t>강화학습은 보상의 합을 키우는 정책을 샘플로 찾는 일이다</a:t>
             </a:r>
           </a:p>
         </p:txBody>
@@ -52287,7 +52287,7 @@
                 <a:ea typeface="Malgun Gothic"/>
                 <a:cs typeface="Malgun Gothic"/>
               </a:rPr>
-              <a:t>늦은 보상(신용 할당), 모르는 행동(탐색), 바뀌는 자료(분포 이동).</a:t>
+              <a:t>늦은 보상(신용 할당), 모르는 행동(탐색), 바뀌는 데이터(분포 이동).</a:t>
             </a:r>
           </a:p>
         </p:txBody>
@@ -52708,7 +52708,7 @@
                 <a:ea typeface="Malgun Gothic"/>
                 <a:cs typeface="Malgun Gothic"/>
               </a:rPr>
-              <a:t>자료와 모델</a:t>
+              <a:t>데이터와 모델</a:t>
             </a:r>
           </a:p>
         </p:txBody>
@@ -52722,7 +52722,7 @@
         <p:spPr>
           <a:xfrm>
             <a:off x="6388100" y="3008709"/>
-            <a:ext cx="5094288" cy="327000"/>
+            <a:ext cx="5094288" cy="603200"/>
           </a:xfrm>
           <a:prstGeom prst="rect">
             <a:avLst/>
@@ -52749,7 +52749,7 @@
                 <a:ea typeface="Malgun Gothic"/>
                 <a:cs typeface="Malgun Gothic"/>
               </a:rPr>
-              <a:t>쌓아 둔 자료를 쓰면 과대평가를, 모델을 쓰면 모델 오차를 막는 장치가 필요하다.</a:t>
+              <a:t>쌓아 둔 데이터를 쓰면 과대평가를, 모델을 쓰면 모델 오차를 막는 장치가 필요하다.</a:t>
             </a:r>
           </a:p>
         </p:txBody>
@@ -52939,7 +52939,7 @@
                 <a:ea typeface="Malgun Gothic"/>
                 <a:cs typeface="Malgun Gothic"/>
               </a:rPr>
-              <a:t>맞바꿈</a:t>
+              <a:t>트레이드오프</a:t>
             </a:r>
           </a:p>
         </p:txBody>
@@ -52980,7 +52980,7 @@
                 <a:ea typeface="Malgun Gothic"/>
                 <a:cs typeface="Malgun Gothic"/>
               </a:rPr>
-              <a:t>편향 ↔ 분산, 표본 ↔ 가정, 탐색 ↔ 활용, 평균 ↔ 꼬리.</a:t>
+              <a:t>편향 ↔ 분산, 샘플 ↔ 가정, 탐색 ↔ 활용, 평균 ↔ 꼬리.</a:t>
             </a:r>
           </a:p>
         </p:txBody>
@@ -53706,7 +53706,7 @@
                           <a:ea typeface="Malgun Gothic"/>
                           <a:cs typeface="Malgun Gothic"/>
                         </a:rPr>
-                        <a:t>깊은 가치 기반 RL의 출발점</a:t>
+                        <a:t>심층 가치 기반 RL의 출발점</a:t>
                       </a:r>
                     </a:p>
                   </a:txBody>
@@ -53780,7 +53780,7 @@
                           <a:ea typeface="Malgun Gothic"/>
                           <a:cs typeface="Malgun Gothic"/>
                         </a:rPr>
-                        <a:t>지금 가장 많이 쓰는 두 기준</a:t>
+                        <a:t>지금 가장 많이 쓰는 두 표준 알고리즘</a:t>
                       </a:r>
                     </a:p>
                   </a:txBody>
@@ -54492,9 +54492,9 @@
                 <a:tableStyleId>{5C22544A-7EE6-4342-B048-85BDC9FD1C3A}</a:tableStyleId>
               </a:tblPr>
               <a:tblGrid>
-                <a:gridCol w="1388467"/>
-                <a:gridCol w="1677591"/>
-                <a:gridCol w="2191742"/>
+                <a:gridCol w="1349375"/>
+                <a:gridCol w="1630263"/>
+                <a:gridCol w="2278162"/>
               </a:tblGrid>
               <a:tr h="285477">
                 <a:tc>
@@ -54647,7 +54647,7 @@
                           <a:ea typeface="Malgun Gothic"/>
                           <a:cs typeface="Malgun Gothic"/>
                         </a:rPr>
-                        <a:t>자료</a:t>
+                        <a:t>데이터</a:t>
                       </a:r>
                     </a:p>
                   </a:txBody>
@@ -54695,7 +54695,7 @@
                           <a:ea typeface="Malgun Gothic"/>
                           <a:cs typeface="Malgun Gothic"/>
                         </a:rPr>
-                        <a:t>내 행동이 다음 자료를 만든다</a:t>
+                        <a:t>내 행동이 다음 데이터를 만든다</a:t>
                       </a:r>
                     </a:p>
                   </a:txBody>
@@ -56051,9 +56051,9 @@
                 <a:tableStyleId>{5C22544A-7EE6-4342-B048-85BDC9FD1C3A}</a:tableStyleId>
               </a:tblPr>
               <a:tblGrid>
-                <a:gridCol w="1516261"/>
-                <a:gridCol w="1615480"/>
-                <a:gridCol w="7637859"/>
+                <a:gridCol w="1388368"/>
+                <a:gridCol w="1804690"/>
+                <a:gridCol w="7576542"/>
               </a:tblGrid>
               <a:tr h="292814">
                 <a:tc>
@@ -56521,7 +56521,7 @@
                           <a:ea typeface="Malgun Gothic"/>
                           <a:cs typeface="Malgun Gothic"/>
                         </a:rPr>
-                        <a:t>. 한 번 굴린 기록, 끝이 있으면 에피소드</a:t>
+                        <a:t>. 한 번 rollout한 기록, 끝이 있으면 에피소드</a:t>
                       </a:r>
                     </a:p>
                   </a:txBody>
@@ -56571,7 +56571,7 @@
                           <a:ea typeface="Malgun Gothic"/>
                           <a:cs typeface="Malgun Gothic"/>
                         </a:rPr>
-                        <a:t>수익</a:t>
+                        <a:t>수익(return)</a:t>
                       </a:r>
                     </a:p>
                   </a:txBody>
@@ -56804,7 +56804,7 @@
                           <a:ea typeface="Malgun Gothic"/>
                           <a:cs typeface="Malgun Gothic"/>
                         </a:rPr>
-                        <a:t>이점</a:t>
+                        <a:t>advantage</a:t>
                       </a:r>
                     </a:p>
                   </a:txBody>
